--- a/week1_microcontrollers/slides/week1.pptx
+++ b/week1_microcontrollers/slides/week1.pptx
@@ -5,10 +5,10 @@
     <p:sldMasterId id="2147483692" r:id="rId4"/>
   </p:sldMasterIdLst>
   <p:notesMasterIdLst>
-    <p:notesMasterId r:id="rId32"/>
+    <p:notesMasterId r:id="rId38"/>
   </p:notesMasterIdLst>
   <p:handoutMasterIdLst>
-    <p:handoutMasterId r:id="rId33"/>
+    <p:handoutMasterId r:id="rId39"/>
   </p:handoutMasterIdLst>
   <p:sldIdLst>
     <p:sldId id="354" r:id="rId5"/>
@@ -21,23 +21,29 @@
     <p:sldId id="375" r:id="rId12"/>
     <p:sldId id="376" r:id="rId13"/>
     <p:sldId id="380" r:id="rId14"/>
-    <p:sldId id="381" r:id="rId15"/>
-    <p:sldId id="382" r:id="rId16"/>
-    <p:sldId id="383" r:id="rId17"/>
-    <p:sldId id="384" r:id="rId18"/>
-    <p:sldId id="385" r:id="rId19"/>
-    <p:sldId id="377" r:id="rId20"/>
-    <p:sldId id="386" r:id="rId21"/>
-    <p:sldId id="387" r:id="rId22"/>
-    <p:sldId id="388" r:id="rId23"/>
-    <p:sldId id="378" r:id="rId24"/>
-    <p:sldId id="379" r:id="rId25"/>
-    <p:sldId id="389" r:id="rId26"/>
-    <p:sldId id="390" r:id="rId27"/>
-    <p:sldId id="391" r:id="rId28"/>
-    <p:sldId id="393" r:id="rId29"/>
-    <p:sldId id="392" r:id="rId30"/>
-    <p:sldId id="394" r:id="rId31"/>
+    <p:sldId id="382" r:id="rId15"/>
+    <p:sldId id="381" r:id="rId16"/>
+    <p:sldId id="400" r:id="rId17"/>
+    <p:sldId id="401" r:id="rId18"/>
+    <p:sldId id="383" r:id="rId19"/>
+    <p:sldId id="402" r:id="rId20"/>
+    <p:sldId id="384" r:id="rId21"/>
+    <p:sldId id="377" r:id="rId22"/>
+    <p:sldId id="386" r:id="rId23"/>
+    <p:sldId id="388" r:id="rId24"/>
+    <p:sldId id="378" r:id="rId25"/>
+    <p:sldId id="379" r:id="rId26"/>
+    <p:sldId id="389" r:id="rId27"/>
+    <p:sldId id="390" r:id="rId28"/>
+    <p:sldId id="391" r:id="rId29"/>
+    <p:sldId id="393" r:id="rId30"/>
+    <p:sldId id="395" r:id="rId31"/>
+    <p:sldId id="392" r:id="rId32"/>
+    <p:sldId id="394" r:id="rId33"/>
+    <p:sldId id="396" r:id="rId34"/>
+    <p:sldId id="397" r:id="rId35"/>
+    <p:sldId id="398" r:id="rId36"/>
+    <p:sldId id="399" r:id="rId37"/>
   </p:sldIdLst>
   <p:sldSz cx="12188825" cy="6858000"/>
   <p:notesSz cx="6858000" cy="9144000"/>
@@ -177,6 +183,495 @@
 </p1510:revInfo>
 </file>
 
+<file path=ppt/changesInfos/changesInfo1.xml><?xml version="1.0" encoding="utf-8"?>
+<pc:chgInfo xmlns:a="http://schemas.openxmlformats.org/drawingml/2006/main" xmlns:r="http://schemas.openxmlformats.org/officeDocument/2006/relationships" xmlns:ac="http://schemas.microsoft.com/office/drawing/2013/main/command" xmlns:pc="http://schemas.microsoft.com/office/powerpoint/2013/main/command">
+  <pc:docChgLst>
+    <pc:chgData name="Caroline Huang" userId="637e23276382cf25" providerId="LiveId" clId="{C62AA357-129C-4E51-9718-458107F05071}"/>
+    <pc:docChg chg="undo custSel addSld delSld modSld sldOrd">
+      <pc:chgData name="Caroline Huang" userId="637e23276382cf25" providerId="LiveId" clId="{C62AA357-129C-4E51-9718-458107F05071}" dt="2026-10-04T18:10:10.948" v="4777" actId="2696"/>
+      <pc:docMkLst>
+        <pc:docMk/>
+      </pc:docMkLst>
+      <pc:sldChg chg="modSp mod">
+        <pc:chgData name="Caroline Huang" userId="637e23276382cf25" providerId="LiveId" clId="{C62AA357-129C-4E51-9718-458107F05071}" dt="2026-10-04T17:54:31.456" v="3188" actId="20577"/>
+        <pc:sldMkLst>
+          <pc:docMk/>
+          <pc:sldMk cId="1302786282" sldId="380"/>
+        </pc:sldMkLst>
+        <pc:spChg chg="mod">
+          <ac:chgData name="Caroline Huang" userId="637e23276382cf25" providerId="LiveId" clId="{C62AA357-129C-4E51-9718-458107F05071}" dt="2026-10-04T17:54:31.456" v="3188" actId="20577"/>
+          <ac:spMkLst>
+            <pc:docMk/>
+            <pc:sldMk cId="1302786282" sldId="380"/>
+            <ac:spMk id="3" creationId="{265D3D74-436F-D935-9468-040D76E6AB40}"/>
+          </ac:spMkLst>
+        </pc:spChg>
+      </pc:sldChg>
+      <pc:sldChg chg="addSp delSp modSp mod">
+        <pc:chgData name="Caroline Huang" userId="637e23276382cf25" providerId="LiveId" clId="{C62AA357-129C-4E51-9718-458107F05071}" dt="2026-10-04T18:01:02.305" v="3237" actId="1076"/>
+        <pc:sldMkLst>
+          <pc:docMk/>
+          <pc:sldMk cId="1457984593" sldId="381"/>
+        </pc:sldMkLst>
+        <pc:spChg chg="del">
+          <ac:chgData name="Caroline Huang" userId="637e23276382cf25" providerId="LiveId" clId="{C62AA357-129C-4E51-9718-458107F05071}" dt="2026-10-04T17:55:09.056" v="3189" actId="478"/>
+          <ac:spMkLst>
+            <pc:docMk/>
+            <pc:sldMk cId="1457984593" sldId="381"/>
+            <ac:spMk id="3" creationId="{4C3716F6-3104-DBAE-5E89-6E5642E522CA}"/>
+          </ac:spMkLst>
+        </pc:spChg>
+        <pc:spChg chg="add del mod">
+          <ac:chgData name="Caroline Huang" userId="637e23276382cf25" providerId="LiveId" clId="{C62AA357-129C-4E51-9718-458107F05071}" dt="2026-10-04T17:56:07.024" v="3207" actId="478"/>
+          <ac:spMkLst>
+            <pc:docMk/>
+            <pc:sldMk cId="1457984593" sldId="381"/>
+            <ac:spMk id="6" creationId="{AEBBA6A6-BF19-A823-BDE0-EB51C34F07F6}"/>
+          </ac:spMkLst>
+        </pc:spChg>
+        <pc:spChg chg="add del mod">
+          <ac:chgData name="Caroline Huang" userId="637e23276382cf25" providerId="LiveId" clId="{C62AA357-129C-4E51-9718-458107F05071}" dt="2026-10-04T17:56:08.785" v="3209" actId="478"/>
+          <ac:spMkLst>
+            <pc:docMk/>
+            <pc:sldMk cId="1457984593" sldId="381"/>
+            <ac:spMk id="8" creationId="{F674915C-9D17-28C3-DB53-691F76AD4405}"/>
+          </ac:spMkLst>
+        </pc:spChg>
+        <pc:picChg chg="add del mod">
+          <ac:chgData name="Caroline Huang" userId="637e23276382cf25" providerId="LiveId" clId="{C62AA357-129C-4E51-9718-458107F05071}" dt="2026-10-04T17:59:03.064" v="3227" actId="478"/>
+          <ac:picMkLst>
+            <pc:docMk/>
+            <pc:sldMk cId="1457984593" sldId="381"/>
+            <ac:picMk id="10" creationId="{1A49EB74-3C86-65C4-81A7-035C47B279AB}"/>
+          </ac:picMkLst>
+        </pc:picChg>
+        <pc:picChg chg="add del mod">
+          <ac:chgData name="Caroline Huang" userId="637e23276382cf25" providerId="LiveId" clId="{C62AA357-129C-4E51-9718-458107F05071}" dt="2026-10-04T17:57:07.994" v="3220" actId="478"/>
+          <ac:picMkLst>
+            <pc:docMk/>
+            <pc:sldMk cId="1457984593" sldId="381"/>
+            <ac:picMk id="12" creationId="{A7D9F483-852D-2EB1-49F6-AD30472E9C6F}"/>
+          </ac:picMkLst>
+        </pc:picChg>
+        <pc:picChg chg="add mod">
+          <ac:chgData name="Caroline Huang" userId="637e23276382cf25" providerId="LiveId" clId="{C62AA357-129C-4E51-9718-458107F05071}" dt="2026-10-04T18:01:02.305" v="3237" actId="1076"/>
+          <ac:picMkLst>
+            <pc:docMk/>
+            <pc:sldMk cId="1457984593" sldId="381"/>
+            <ac:picMk id="14" creationId="{327079E3-070C-D764-A003-8ABA551D12C5}"/>
+          </ac:picMkLst>
+        </pc:picChg>
+        <pc:picChg chg="add del mod">
+          <ac:chgData name="Caroline Huang" userId="637e23276382cf25" providerId="LiveId" clId="{C62AA357-129C-4E51-9718-458107F05071}" dt="2026-10-04T18:00:32.079" v="3231" actId="478"/>
+          <ac:picMkLst>
+            <pc:docMk/>
+            <pc:sldMk cId="1457984593" sldId="381"/>
+            <ac:picMk id="16" creationId="{B6BC4D84-EF2B-0FC1-2313-C03D60A0769D}"/>
+          </ac:picMkLst>
+        </pc:picChg>
+        <pc:picChg chg="add mod">
+          <ac:chgData name="Caroline Huang" userId="637e23276382cf25" providerId="LiveId" clId="{C62AA357-129C-4E51-9718-458107F05071}" dt="2026-10-04T18:00:59.035" v="3236" actId="1076"/>
+          <ac:picMkLst>
+            <pc:docMk/>
+            <pc:sldMk cId="1457984593" sldId="381"/>
+            <ac:picMk id="18" creationId="{2E902159-ECCB-4121-89C8-31E27805B8D9}"/>
+          </ac:picMkLst>
+        </pc:picChg>
+      </pc:sldChg>
+      <pc:sldChg chg="addSp modSp mod ord">
+        <pc:chgData name="Caroline Huang" userId="637e23276382cf25" providerId="LiveId" clId="{C62AA357-129C-4E51-9718-458107F05071}" dt="2026-10-04T18:05:17.989" v="3454"/>
+        <pc:sldMkLst>
+          <pc:docMk/>
+          <pc:sldMk cId="2394351120" sldId="382"/>
+        </pc:sldMkLst>
+        <pc:spChg chg="mod">
+          <ac:chgData name="Caroline Huang" userId="637e23276382cf25" providerId="LiveId" clId="{C62AA357-129C-4E51-9718-458107F05071}" dt="2026-10-04T18:05:00.779" v="3449" actId="20577"/>
+          <ac:spMkLst>
+            <pc:docMk/>
+            <pc:sldMk cId="2394351120" sldId="382"/>
+            <ac:spMk id="3" creationId="{833AC6AB-A0D7-479C-4DED-8F4335D906BF}"/>
+          </ac:spMkLst>
+        </pc:spChg>
+        <pc:picChg chg="add mod">
+          <ac:chgData name="Caroline Huang" userId="637e23276382cf25" providerId="LiveId" clId="{C62AA357-129C-4E51-9718-458107F05071}" dt="2026-10-04T18:05:09.180" v="3452" actId="1076"/>
+          <ac:picMkLst>
+            <pc:docMk/>
+            <pc:sldMk cId="2394351120" sldId="382"/>
+            <ac:picMk id="6" creationId="{484F1A4B-8B7C-D9D8-AC11-237CCD18704C}"/>
+          </ac:picMkLst>
+        </pc:picChg>
+      </pc:sldChg>
+      <pc:sldChg chg="modSp mod">
+        <pc:chgData name="Caroline Huang" userId="637e23276382cf25" providerId="LiveId" clId="{C62AA357-129C-4E51-9718-458107F05071}" dt="2026-10-04T18:07:20.735" v="4078" actId="20577"/>
+        <pc:sldMkLst>
+          <pc:docMk/>
+          <pc:sldMk cId="3320159408" sldId="383"/>
+        </pc:sldMkLst>
+        <pc:spChg chg="mod">
+          <ac:chgData name="Caroline Huang" userId="637e23276382cf25" providerId="LiveId" clId="{C62AA357-129C-4E51-9718-458107F05071}" dt="2026-10-04T18:07:20.735" v="4078" actId="20577"/>
+          <ac:spMkLst>
+            <pc:docMk/>
+            <pc:sldMk cId="3320159408" sldId="383"/>
+            <ac:spMk id="3" creationId="{EA875BA9-AE56-A82F-312B-3CD5B4991C55}"/>
+          </ac:spMkLst>
+        </pc:spChg>
+      </pc:sldChg>
+      <pc:sldChg chg="modSp mod ord">
+        <pc:chgData name="Caroline Huang" userId="637e23276382cf25" providerId="LiveId" clId="{C62AA357-129C-4E51-9718-458107F05071}" dt="2026-10-04T18:10:07.448" v="4776" actId="15"/>
+        <pc:sldMkLst>
+          <pc:docMk/>
+          <pc:sldMk cId="4119718190" sldId="384"/>
+        </pc:sldMkLst>
+        <pc:spChg chg="mod">
+          <ac:chgData name="Caroline Huang" userId="637e23276382cf25" providerId="LiveId" clId="{C62AA357-129C-4E51-9718-458107F05071}" dt="2026-10-04T18:10:07.448" v="4776" actId="15"/>
+          <ac:spMkLst>
+            <pc:docMk/>
+            <pc:sldMk cId="4119718190" sldId="384"/>
+            <ac:spMk id="3" creationId="{E4E51146-0EB3-530A-888F-E719E1C64DFB}"/>
+          </ac:spMkLst>
+        </pc:spChg>
+      </pc:sldChg>
+      <pc:sldChg chg="del">
+        <pc:chgData name="Caroline Huang" userId="637e23276382cf25" providerId="LiveId" clId="{C62AA357-129C-4E51-9718-458107F05071}" dt="2026-10-04T18:10:10.948" v="4777" actId="2696"/>
+        <pc:sldMkLst>
+          <pc:docMk/>
+          <pc:sldMk cId="3808367869" sldId="385"/>
+        </pc:sldMkLst>
+      </pc:sldChg>
+      <pc:sldChg chg="del">
+        <pc:chgData name="Caroline Huang" userId="637e23276382cf25" providerId="LiveId" clId="{C62AA357-129C-4E51-9718-458107F05071}" dt="2026-10-04T17:39:37.174" v="0" actId="2696"/>
+        <pc:sldMkLst>
+          <pc:docMk/>
+          <pc:sldMk cId="1307423825" sldId="387"/>
+        </pc:sldMkLst>
+      </pc:sldChg>
+      <pc:sldChg chg="modSp mod">
+        <pc:chgData name="Caroline Huang" userId="637e23276382cf25" providerId="LiveId" clId="{C62AA357-129C-4E51-9718-458107F05071}" dt="2026-10-04T17:43:22.560" v="866" actId="20577"/>
+        <pc:sldMkLst>
+          <pc:docMk/>
+          <pc:sldMk cId="177401191" sldId="389"/>
+        </pc:sldMkLst>
+        <pc:spChg chg="mod">
+          <ac:chgData name="Caroline Huang" userId="637e23276382cf25" providerId="LiveId" clId="{C62AA357-129C-4E51-9718-458107F05071}" dt="2026-10-04T17:43:22.560" v="866" actId="20577"/>
+          <ac:spMkLst>
+            <pc:docMk/>
+            <pc:sldMk cId="177401191" sldId="389"/>
+            <ac:spMk id="3" creationId="{960D71AB-B055-203D-F33E-2DCA7A5AB900}"/>
+          </ac:spMkLst>
+        </pc:spChg>
+      </pc:sldChg>
+      <pc:sldChg chg="modSp mod">
+        <pc:chgData name="Caroline Huang" userId="637e23276382cf25" providerId="LiveId" clId="{C62AA357-129C-4E51-9718-458107F05071}" dt="2026-10-04T17:43:03.370" v="783" actId="20577"/>
+        <pc:sldMkLst>
+          <pc:docMk/>
+          <pc:sldMk cId="129409664" sldId="390"/>
+        </pc:sldMkLst>
+        <pc:spChg chg="mod">
+          <ac:chgData name="Caroline Huang" userId="637e23276382cf25" providerId="LiveId" clId="{C62AA357-129C-4E51-9718-458107F05071}" dt="2026-10-04T17:43:03.370" v="783" actId="20577"/>
+          <ac:spMkLst>
+            <pc:docMk/>
+            <pc:sldMk cId="129409664" sldId="390"/>
+            <ac:spMk id="3" creationId="{876C86DF-5160-6923-A962-B383ABC1DB26}"/>
+          </ac:spMkLst>
+        </pc:spChg>
+      </pc:sldChg>
+      <pc:sldChg chg="modSp mod">
+        <pc:chgData name="Caroline Huang" userId="637e23276382cf25" providerId="LiveId" clId="{C62AA357-129C-4E51-9718-458107F05071}" dt="2026-10-04T17:45:05.711" v="1347" actId="20577"/>
+        <pc:sldMkLst>
+          <pc:docMk/>
+          <pc:sldMk cId="3799692162" sldId="393"/>
+        </pc:sldMkLst>
+        <pc:spChg chg="mod">
+          <ac:chgData name="Caroline Huang" userId="637e23276382cf25" providerId="LiveId" clId="{C62AA357-129C-4E51-9718-458107F05071}" dt="2026-10-04T17:43:37.491" v="891" actId="20577"/>
+          <ac:spMkLst>
+            <pc:docMk/>
+            <pc:sldMk cId="3799692162" sldId="393"/>
+            <ac:spMk id="2" creationId="{BBF58DCF-A472-E446-A7BD-90B715BADE6D}"/>
+          </ac:spMkLst>
+        </pc:spChg>
+        <pc:spChg chg="mod">
+          <ac:chgData name="Caroline Huang" userId="637e23276382cf25" providerId="LiveId" clId="{C62AA357-129C-4E51-9718-458107F05071}" dt="2026-10-04T17:45:05.711" v="1347" actId="20577"/>
+          <ac:spMkLst>
+            <pc:docMk/>
+            <pc:sldMk cId="3799692162" sldId="393"/>
+            <ac:spMk id="3" creationId="{8CF57ED6-9BB9-10DD-84D4-A9E360934778}"/>
+          </ac:spMkLst>
+        </pc:spChg>
+      </pc:sldChg>
+      <pc:sldChg chg="modSp mod">
+        <pc:chgData name="Caroline Huang" userId="637e23276382cf25" providerId="LiveId" clId="{C62AA357-129C-4E51-9718-458107F05071}" dt="2026-10-04T17:47:16.138" v="1918" actId="20577"/>
+        <pc:sldMkLst>
+          <pc:docMk/>
+          <pc:sldMk cId="2362679890" sldId="394"/>
+        </pc:sldMkLst>
+        <pc:spChg chg="mod">
+          <ac:chgData name="Caroline Huang" userId="637e23276382cf25" providerId="LiveId" clId="{C62AA357-129C-4E51-9718-458107F05071}" dt="2026-10-04T17:45:29.140" v="1389" actId="20577"/>
+          <ac:spMkLst>
+            <pc:docMk/>
+            <pc:sldMk cId="2362679890" sldId="394"/>
+            <ac:spMk id="2" creationId="{99F5F3DF-EC67-C8C7-BAA2-2E4243EBCAF0}"/>
+          </ac:spMkLst>
+        </pc:spChg>
+        <pc:spChg chg="mod">
+          <ac:chgData name="Caroline Huang" userId="637e23276382cf25" providerId="LiveId" clId="{C62AA357-129C-4E51-9718-458107F05071}" dt="2026-10-04T17:47:16.138" v="1918" actId="20577"/>
+          <ac:spMkLst>
+            <pc:docMk/>
+            <pc:sldMk cId="2362679890" sldId="394"/>
+            <ac:spMk id="3" creationId="{CB3E4E5A-BB6A-74B0-821F-C128A4481588}"/>
+          </ac:spMkLst>
+        </pc:spChg>
+      </pc:sldChg>
+      <pc:sldChg chg="addSp delSp modSp add mod">
+        <pc:chgData name="Caroline Huang" userId="637e23276382cf25" providerId="LiveId" clId="{C62AA357-129C-4E51-9718-458107F05071}" dt="2026-10-04T17:47:58.287" v="1950" actId="1076"/>
+        <pc:sldMkLst>
+          <pc:docMk/>
+          <pc:sldMk cId="4014972151" sldId="395"/>
+        </pc:sldMkLst>
+        <pc:spChg chg="mod">
+          <ac:chgData name="Caroline Huang" userId="637e23276382cf25" providerId="LiveId" clId="{C62AA357-129C-4E51-9718-458107F05071}" dt="2026-10-04T17:45:12.442" v="1370" actId="20577"/>
+          <ac:spMkLst>
+            <pc:docMk/>
+            <pc:sldMk cId="4014972151" sldId="395"/>
+            <ac:spMk id="2" creationId="{3AD7ED9A-8031-0795-17E0-B6AB288CED31}"/>
+          </ac:spMkLst>
+        </pc:spChg>
+        <pc:spChg chg="del">
+          <ac:chgData name="Caroline Huang" userId="637e23276382cf25" providerId="LiveId" clId="{C62AA357-129C-4E51-9718-458107F05071}" dt="2026-10-04T17:45:15.022" v="1371" actId="478"/>
+          <ac:spMkLst>
+            <pc:docMk/>
+            <pc:sldMk cId="4014972151" sldId="395"/>
+            <ac:spMk id="3" creationId="{E8BF77FF-07AA-C1E7-E0C7-92DE74AE55BF}"/>
+          </ac:spMkLst>
+        </pc:spChg>
+        <pc:picChg chg="add mod">
+          <ac:chgData name="Caroline Huang" userId="637e23276382cf25" providerId="LiveId" clId="{C62AA357-129C-4E51-9718-458107F05071}" dt="2026-10-04T17:47:58.287" v="1950" actId="1076"/>
+          <ac:picMkLst>
+            <pc:docMk/>
+            <pc:sldMk cId="4014972151" sldId="395"/>
+            <ac:picMk id="6" creationId="{8E1BEEA6-DF04-21E7-B29B-04D1CC055932}"/>
+          </ac:picMkLst>
+        </pc:picChg>
+      </pc:sldChg>
+      <pc:sldChg chg="addSp delSp modSp add mod">
+        <pc:chgData name="Caroline Huang" userId="637e23276382cf25" providerId="LiveId" clId="{C62AA357-129C-4E51-9718-458107F05071}" dt="2026-10-04T17:48:52.166" v="1955" actId="1076"/>
+        <pc:sldMkLst>
+          <pc:docMk/>
+          <pc:sldMk cId="3218567944" sldId="396"/>
+        </pc:sldMkLst>
+        <pc:spChg chg="mod">
+          <ac:chgData name="Caroline Huang" userId="637e23276382cf25" providerId="LiveId" clId="{C62AA357-129C-4E51-9718-458107F05071}" dt="2026-10-04T17:47:26.645" v="1943" actId="20577"/>
+          <ac:spMkLst>
+            <pc:docMk/>
+            <pc:sldMk cId="3218567944" sldId="396"/>
+            <ac:spMk id="2" creationId="{168E3C15-7A7A-812D-B341-C866E2A1EB98}"/>
+          </ac:spMkLst>
+        </pc:spChg>
+        <pc:spChg chg="del">
+          <ac:chgData name="Caroline Huang" userId="637e23276382cf25" providerId="LiveId" clId="{C62AA357-129C-4E51-9718-458107F05071}" dt="2026-10-04T17:47:42.780" v="1944" actId="478"/>
+          <ac:spMkLst>
+            <pc:docMk/>
+            <pc:sldMk cId="3218567944" sldId="396"/>
+            <ac:spMk id="3" creationId="{04FC4EC8-F3F8-A29E-4D14-AA18F0DCE526}"/>
+          </ac:spMkLst>
+        </pc:spChg>
+        <pc:spChg chg="add del mod">
+          <ac:chgData name="Caroline Huang" userId="637e23276382cf25" providerId="LiveId" clId="{C62AA357-129C-4E51-9718-458107F05071}" dt="2026-10-04T17:47:45.576" v="1946" actId="478"/>
+          <ac:spMkLst>
+            <pc:docMk/>
+            <pc:sldMk cId="3218567944" sldId="396"/>
+            <ac:spMk id="6" creationId="{D618E57F-4174-9997-2F8B-C69F76FCD201}"/>
+          </ac:spMkLst>
+        </pc:spChg>
+        <pc:picChg chg="add del mod">
+          <ac:chgData name="Caroline Huang" userId="637e23276382cf25" providerId="LiveId" clId="{C62AA357-129C-4E51-9718-458107F05071}" dt="2026-10-04T17:48:44.923" v="1952" actId="478"/>
+          <ac:picMkLst>
+            <pc:docMk/>
+            <pc:sldMk cId="3218567944" sldId="396"/>
+            <ac:picMk id="8" creationId="{E642B789-AE18-A089-658E-CF2B426A855B}"/>
+          </ac:picMkLst>
+        </pc:picChg>
+        <pc:picChg chg="add mod">
+          <ac:chgData name="Caroline Huang" userId="637e23276382cf25" providerId="LiveId" clId="{C62AA357-129C-4E51-9718-458107F05071}" dt="2026-10-04T17:48:52.166" v="1955" actId="1076"/>
+          <ac:picMkLst>
+            <pc:docMk/>
+            <pc:sldMk cId="3218567944" sldId="396"/>
+            <ac:picMk id="10" creationId="{48DA8DA8-05AF-ACBD-D353-C6CC40F8D40A}"/>
+          </ac:picMkLst>
+        </pc:picChg>
+      </pc:sldChg>
+      <pc:sldChg chg="modSp add mod ord">
+        <pc:chgData name="Caroline Huang" userId="637e23276382cf25" providerId="LiveId" clId="{C62AA357-129C-4E51-9718-458107F05071}" dt="2026-10-04T17:49:06.238" v="1976" actId="20577"/>
+        <pc:sldMkLst>
+          <pc:docMk/>
+          <pc:sldMk cId="605230303" sldId="397"/>
+        </pc:sldMkLst>
+        <pc:spChg chg="mod">
+          <ac:chgData name="Caroline Huang" userId="637e23276382cf25" providerId="LiveId" clId="{C62AA357-129C-4E51-9718-458107F05071}" dt="2026-10-04T17:49:06.238" v="1976" actId="20577"/>
+          <ac:spMkLst>
+            <pc:docMk/>
+            <pc:sldMk cId="605230303" sldId="397"/>
+            <ac:spMk id="2" creationId="{9F81DE79-C322-EB02-C020-15FBC4EFF8F3}"/>
+          </ac:spMkLst>
+        </pc:spChg>
+      </pc:sldChg>
+      <pc:sldChg chg="add del">
+        <pc:chgData name="Caroline Huang" userId="637e23276382cf25" providerId="LiveId" clId="{C62AA357-129C-4E51-9718-458107F05071}" dt="2026-10-04T17:48:53.930" v="1956" actId="47"/>
+        <pc:sldMkLst>
+          <pc:docMk/>
+          <pc:sldMk cId="970323252" sldId="397"/>
+        </pc:sldMkLst>
+      </pc:sldChg>
+      <pc:sldChg chg="addSp delSp modSp add mod ord">
+        <pc:chgData name="Caroline Huang" userId="637e23276382cf25" providerId="LiveId" clId="{C62AA357-129C-4E51-9718-458107F05071}" dt="2026-10-04T17:52:31.664" v="2886" actId="22"/>
+        <pc:sldMkLst>
+          <pc:docMk/>
+          <pc:sldMk cId="1498066369" sldId="398"/>
+        </pc:sldMkLst>
+        <pc:spChg chg="mod">
+          <ac:chgData name="Caroline Huang" userId="637e23276382cf25" providerId="LiveId" clId="{C62AA357-129C-4E51-9718-458107F05071}" dt="2026-10-04T17:49:14.826" v="1988" actId="20577"/>
+          <ac:spMkLst>
+            <pc:docMk/>
+            <pc:sldMk cId="1498066369" sldId="398"/>
+            <ac:spMk id="2" creationId="{B4078902-93B5-5AFD-2DBF-BCB91EEF23CC}"/>
+          </ac:spMkLst>
+        </pc:spChg>
+        <pc:spChg chg="mod">
+          <ac:chgData name="Caroline Huang" userId="637e23276382cf25" providerId="LiveId" clId="{C62AA357-129C-4E51-9718-458107F05071}" dt="2026-10-04T17:52:29.801" v="2884" actId="14"/>
+          <ac:spMkLst>
+            <pc:docMk/>
+            <pc:sldMk cId="1498066369" sldId="398"/>
+            <ac:spMk id="3" creationId="{C0328EA5-75F2-1983-A1C8-7961D1498670}"/>
+          </ac:spMkLst>
+        </pc:spChg>
+        <pc:picChg chg="add del">
+          <ac:chgData name="Caroline Huang" userId="637e23276382cf25" providerId="LiveId" clId="{C62AA357-129C-4E51-9718-458107F05071}" dt="2026-10-04T17:52:31.664" v="2886" actId="22"/>
+          <ac:picMkLst>
+            <pc:docMk/>
+            <pc:sldMk cId="1498066369" sldId="398"/>
+            <ac:picMk id="6" creationId="{493B4684-D1D6-E497-2C21-C774BE8FEF43}"/>
+          </ac:picMkLst>
+        </pc:picChg>
+      </pc:sldChg>
+      <pc:sldChg chg="addSp delSp modSp add mod">
+        <pc:chgData name="Caroline Huang" userId="637e23276382cf25" providerId="LiveId" clId="{C62AA357-129C-4E51-9718-458107F05071}" dt="2026-10-04T17:52:44.337" v="2892" actId="1076"/>
+        <pc:sldMkLst>
+          <pc:docMk/>
+          <pc:sldMk cId="1684696493" sldId="399"/>
+        </pc:sldMkLst>
+        <pc:spChg chg="del">
+          <ac:chgData name="Caroline Huang" userId="637e23276382cf25" providerId="LiveId" clId="{C62AA357-129C-4E51-9718-458107F05071}" dt="2026-10-04T17:52:36.474" v="2888" actId="478"/>
+          <ac:spMkLst>
+            <pc:docMk/>
+            <pc:sldMk cId="1684696493" sldId="399"/>
+            <ac:spMk id="3" creationId="{FD7C5AFC-9C6D-4B2C-26D4-EE1F6EB4DF54}"/>
+          </ac:spMkLst>
+        </pc:spChg>
+        <pc:spChg chg="add del mod">
+          <ac:chgData name="Caroline Huang" userId="637e23276382cf25" providerId="LiveId" clId="{C62AA357-129C-4E51-9718-458107F05071}" dt="2026-10-04T17:52:38.695" v="2890" actId="478"/>
+          <ac:spMkLst>
+            <pc:docMk/>
+            <pc:sldMk cId="1684696493" sldId="399"/>
+            <ac:spMk id="6" creationId="{F9A1ECC0-436C-19DD-EBE0-11E46C643FCE}"/>
+          </ac:spMkLst>
+        </pc:spChg>
+        <pc:picChg chg="add mod">
+          <ac:chgData name="Caroline Huang" userId="637e23276382cf25" providerId="LiveId" clId="{C62AA357-129C-4E51-9718-458107F05071}" dt="2026-10-04T17:52:44.337" v="2892" actId="1076"/>
+          <ac:picMkLst>
+            <pc:docMk/>
+            <pc:sldMk cId="1684696493" sldId="399"/>
+            <ac:picMk id="8" creationId="{E1B5373B-BC9F-6DF7-4B21-8F9A9C57A529}"/>
+          </ac:picMkLst>
+        </pc:picChg>
+      </pc:sldChg>
+      <pc:sldChg chg="new add del">
+        <pc:chgData name="Caroline Huang" userId="637e23276382cf25" providerId="LiveId" clId="{C62AA357-129C-4E51-9718-458107F05071}" dt="2026-10-04T17:55:46.661" v="3194" actId="680"/>
+        <pc:sldMkLst>
+          <pc:docMk/>
+          <pc:sldMk cId="408914309" sldId="400"/>
+        </pc:sldMkLst>
+      </pc:sldChg>
+      <pc:sldChg chg="delSp modSp add mod">
+        <pc:chgData name="Caroline Huang" userId="637e23276382cf25" providerId="LiveId" clId="{C62AA357-129C-4E51-9718-458107F05071}" dt="2026-10-04T18:01:09.710" v="3238" actId="1076"/>
+        <pc:sldMkLst>
+          <pc:docMk/>
+          <pc:sldMk cId="937413884" sldId="400"/>
+        </pc:sldMkLst>
+        <pc:picChg chg="del">
+          <ac:chgData name="Caroline Huang" userId="637e23276382cf25" providerId="LiveId" clId="{C62AA357-129C-4E51-9718-458107F05071}" dt="2026-10-04T17:57:03.900" v="3219" actId="478"/>
+          <ac:picMkLst>
+            <pc:docMk/>
+            <pc:sldMk cId="937413884" sldId="400"/>
+            <ac:picMk id="10" creationId="{AA001DD2-C7F8-85C4-D0CA-B08D6DD4FC94}"/>
+          </ac:picMkLst>
+        </pc:picChg>
+        <pc:picChg chg="mod">
+          <ac:chgData name="Caroline Huang" userId="637e23276382cf25" providerId="LiveId" clId="{C62AA357-129C-4E51-9718-458107F05071}" dt="2026-10-04T18:01:09.710" v="3238" actId="1076"/>
+          <ac:picMkLst>
+            <pc:docMk/>
+            <pc:sldMk cId="937413884" sldId="400"/>
+            <ac:picMk id="12" creationId="{1A2629EB-82B2-9FF4-6A21-E07809BC1BD3}"/>
+          </ac:picMkLst>
+        </pc:picChg>
+      </pc:sldChg>
+      <pc:sldChg chg="addSp delSp modSp add mod">
+        <pc:chgData name="Caroline Huang" userId="637e23276382cf25" providerId="LiveId" clId="{C62AA357-129C-4E51-9718-458107F05071}" dt="2026-10-04T18:02:37.953" v="3249" actId="1076"/>
+        <pc:sldMkLst>
+          <pc:docMk/>
+          <pc:sldMk cId="3393081928" sldId="401"/>
+        </pc:sldMkLst>
+        <pc:picChg chg="add del mod">
+          <ac:chgData name="Caroline Huang" userId="637e23276382cf25" providerId="LiveId" clId="{C62AA357-129C-4E51-9718-458107F05071}" dt="2026-10-04T18:02:33.239" v="3246" actId="478"/>
+          <ac:picMkLst>
+            <pc:docMk/>
+            <pc:sldMk cId="3393081928" sldId="401"/>
+            <ac:picMk id="5" creationId="{107A029F-CD66-D845-9D34-443CB7E8DF3C}"/>
+          </ac:picMkLst>
+        </pc:picChg>
+        <pc:picChg chg="add mod">
+          <ac:chgData name="Caroline Huang" userId="637e23276382cf25" providerId="LiveId" clId="{C62AA357-129C-4E51-9718-458107F05071}" dt="2026-10-04T18:02:37.953" v="3249" actId="1076"/>
+          <ac:picMkLst>
+            <pc:docMk/>
+            <pc:sldMk cId="3393081928" sldId="401"/>
+            <ac:picMk id="7" creationId="{D270FAAC-1AF2-91C8-B6D2-1608CE3B4CD1}"/>
+          </ac:picMkLst>
+        </pc:picChg>
+        <pc:picChg chg="del">
+          <ac:chgData name="Caroline Huang" userId="637e23276382cf25" providerId="LiveId" clId="{C62AA357-129C-4E51-9718-458107F05071}" dt="2026-10-04T18:01:52.193" v="3240" actId="478"/>
+          <ac:picMkLst>
+            <pc:docMk/>
+            <pc:sldMk cId="3393081928" sldId="401"/>
+            <ac:picMk id="12" creationId="{031281B4-4F1E-144A-B96D-19B87B52AE23}"/>
+          </ac:picMkLst>
+        </pc:picChg>
+      </pc:sldChg>
+      <pc:sldChg chg="modSp add mod">
+        <pc:chgData name="Caroline Huang" userId="637e23276382cf25" providerId="LiveId" clId="{C62AA357-129C-4E51-9718-458107F05071}" dt="2026-10-04T18:09:24.987" v="4561" actId="20577"/>
+        <pc:sldMkLst>
+          <pc:docMk/>
+          <pc:sldMk cId="2133475131" sldId="402"/>
+        </pc:sldMkLst>
+        <pc:spChg chg="mod">
+          <ac:chgData name="Caroline Huang" userId="637e23276382cf25" providerId="LiveId" clId="{C62AA357-129C-4E51-9718-458107F05071}" dt="2026-10-04T18:08:21.230" v="4190" actId="20577"/>
+          <ac:spMkLst>
+            <pc:docMk/>
+            <pc:sldMk cId="2133475131" sldId="402"/>
+            <ac:spMk id="2" creationId="{EBB6278E-DB15-9F66-EB9C-C082E185B7AD}"/>
+          </ac:spMkLst>
+        </pc:spChg>
+        <pc:spChg chg="mod">
+          <ac:chgData name="Caroline Huang" userId="637e23276382cf25" providerId="LiveId" clId="{C62AA357-129C-4E51-9718-458107F05071}" dt="2026-10-04T18:09:24.987" v="4561" actId="20577"/>
+          <ac:spMkLst>
+            <pc:docMk/>
+            <pc:sldMk cId="2133475131" sldId="402"/>
+            <ac:spMk id="3" creationId="{0D8A8798-7545-DFDE-F594-605768619AC0}"/>
+          </ac:spMkLst>
+        </pc:spChg>
+      </pc:sldChg>
+    </pc:docChg>
+  </pc:docChgLst>
+</pc:chgInfo>
+</file>
+
 <file path=ppt/handoutMasters/handoutMaster1.xml><?xml version="1.0" encoding="utf-8"?>
 <p:handoutMaster xmlns:a="http://schemas.openxmlformats.org/drawingml/2006/main" xmlns:r="http://schemas.openxmlformats.org/officeDocument/2006/relationships" xmlns:p="http://schemas.openxmlformats.org/presentationml/2006/main">
   <p:cSld>
@@ -267,7 +762,7 @@
                   <a:schemeClr val="tx2"/>
                 </a:solidFill>
               </a:rPr>
-              <a:t>10/3/2026</a:t>
+              <a:t>10/4/2026</a:t>
             </a:fld>
             <a:endParaRPr dirty="0">
               <a:solidFill>
@@ -457,7 +952,7 @@
             <a:fld id="{F95CF31C-F757-429C-A789-86504F04C3BE}" type="datetimeFigureOut">
               <a:rPr lang="en-US"/>
               <a:pPr/>
-              <a:t>10/3/2026</a:t>
+              <a:t>10/4/2026</a:t>
             </a:fld>
             <a:endParaRPr dirty="0"/>
           </a:p>
@@ -9126,6 +9621,21 @@
               <a:t>[variable name] = [variable value];</a:t>
             </a:r>
           </a:p>
+          <a:p>
+            <a:endParaRPr lang="en-US" dirty="0"/>
+          </a:p>
+          <a:p>
+            <a:r>
+              <a:rPr lang="en-US" dirty="0"/>
+              <a:t>Declaration must happen before or at the same time as assignment.</a:t>
+            </a:r>
+          </a:p>
+          <a:p>
+            <a:r>
+              <a:rPr lang="en-US" dirty="0"/>
+              <a:t>Variables are useful for making the code more readable and easier to refactor.</a:t>
+            </a:r>
+          </a:p>
         </p:txBody>
       </p:sp>
       <p:sp>
@@ -9168,13 +9678,13 @@
   <p:clrMapOvr>
     <a:masterClrMapping/>
   </p:clrMapOvr>
-  <mc:AlternateContent xmlns:mc="http://schemas.openxmlformats.org/markup-compatibility/2006">
-    <mc:Choice xmlns:p14="http://schemas.microsoft.com/office/powerpoint/2010/main" Requires="p14">
+  <mc:AlternateContent xmlns:mc="http://schemas.openxmlformats.org/markup-compatibility/2006" xmlns:p14="http://schemas.microsoft.com/office/powerpoint/2010/main">
+    <mc:Choice Requires="p14">
       <p:transition spd="med" p14:dur="700">
         <p:fade/>
       </p:transition>
     </mc:Choice>
-    <mc:Fallback>
+    <mc:Fallback xmlns="">
       <p:transition spd="med">
         <p:fade/>
       </p:transition>
@@ -9184,6 +9694,191 @@
 </file>
 
 <file path=ppt/slides/slide11.xml><?xml version="1.0" encoding="utf-8"?>
+<p:sld xmlns:a="http://schemas.openxmlformats.org/drawingml/2006/main" xmlns:r="http://schemas.openxmlformats.org/officeDocument/2006/relationships" xmlns:p="http://schemas.openxmlformats.org/presentationml/2006/main">
+  <p:cSld>
+    <p:spTree>
+      <p:nvGrpSpPr>
+        <p:cNvPr id="1" name="">
+          <a:extLst>
+            <a:ext uri="{FF2B5EF4-FFF2-40B4-BE49-F238E27FC236}">
+              <a16:creationId xmlns:a16="http://schemas.microsoft.com/office/drawing/2014/main" id="{67EA70F3-14B4-40B5-A898-1A9C47322CC2}"/>
+            </a:ext>
+          </a:extLst>
+        </p:cNvPr>
+        <p:cNvGrpSpPr/>
+        <p:nvPr/>
+      </p:nvGrpSpPr>
+      <p:grpSpPr>
+        <a:xfrm>
+          <a:off x="0" y="0"/>
+          <a:ext cx="0" cy="0"/>
+          <a:chOff x="0" y="0"/>
+          <a:chExt cx="0" cy="0"/>
+        </a:xfrm>
+      </p:grpSpPr>
+      <p:sp>
+        <p:nvSpPr>
+          <p:cNvPr id="2" name="Title 1">
+            <a:extLst>
+              <a:ext uri="{FF2B5EF4-FFF2-40B4-BE49-F238E27FC236}">
+                <a16:creationId xmlns:a16="http://schemas.microsoft.com/office/drawing/2014/main" id="{2F0AE178-E686-DE7D-DF92-BEED4A3A2133}"/>
+              </a:ext>
+            </a:extLst>
+          </p:cNvPr>
+          <p:cNvSpPr>
+            <a:spLocks noGrp="1"/>
+          </p:cNvSpPr>
+          <p:nvPr>
+            <p:ph type="title"/>
+          </p:nvPr>
+        </p:nvSpPr>
+        <p:spPr/>
+        <p:txBody>
+          <a:bodyPr>
+            <a:normAutofit/>
+          </a:bodyPr>
+          <a:lstStyle/>
+          <a:p>
+            <a:pPr algn="ctr"/>
+            <a:r>
+              <a:rPr lang="en-US" sz="4400" dirty="0"/>
+              <a:t>Conditionals</a:t>
+            </a:r>
+          </a:p>
+        </p:txBody>
+      </p:sp>
+      <p:sp>
+        <p:nvSpPr>
+          <p:cNvPr id="3" name="Table Placeholder 2">
+            <a:extLst>
+              <a:ext uri="{FF2B5EF4-FFF2-40B4-BE49-F238E27FC236}">
+                <a16:creationId xmlns:a16="http://schemas.microsoft.com/office/drawing/2014/main" id="{833AC6AB-A0D7-479C-4DED-8F4335D906BF}"/>
+              </a:ext>
+            </a:extLst>
+          </p:cNvPr>
+          <p:cNvSpPr>
+            <a:spLocks noGrp="1"/>
+          </p:cNvSpPr>
+          <p:nvPr>
+            <p:ph type="tbl" sz="quarter" idx="13"/>
+          </p:nvPr>
+        </p:nvSpPr>
+        <p:spPr/>
+        <p:txBody>
+          <a:bodyPr/>
+          <a:lstStyle/>
+          <a:p>
+            <a:r>
+              <a:rPr lang="en-US" dirty="0"/>
+              <a:t>if(condition){}</a:t>
+            </a:r>
+          </a:p>
+          <a:p>
+            <a:r>
+              <a:rPr lang="en-US" dirty="0"/>
+              <a:t>If(condition){}, else if(){}…. else{}</a:t>
+            </a:r>
+          </a:p>
+          <a:p>
+            <a:r>
+              <a:rPr lang="en-US" dirty="0"/>
+              <a:t>If(condition){} else{}</a:t>
+            </a:r>
+          </a:p>
+          <a:p>
+            <a:r>
+              <a:rPr lang="en-US" dirty="0"/>
+              <a:t>Logical comparison: &amp;&amp;, ==, !=, !, ..</a:t>
+            </a:r>
+          </a:p>
+        </p:txBody>
+      </p:sp>
+      <p:sp>
+        <p:nvSpPr>
+          <p:cNvPr id="4" name="Slide Number Placeholder 3">
+            <a:extLst>
+              <a:ext uri="{FF2B5EF4-FFF2-40B4-BE49-F238E27FC236}">
+                <a16:creationId xmlns:a16="http://schemas.microsoft.com/office/drawing/2014/main" id="{16FD730A-E531-663F-7EEE-FF5D5D726E55}"/>
+              </a:ext>
+            </a:extLst>
+          </p:cNvPr>
+          <p:cNvSpPr>
+            <a:spLocks noGrp="1"/>
+          </p:cNvSpPr>
+          <p:nvPr>
+            <p:ph type="sldNum" sz="quarter" idx="12"/>
+          </p:nvPr>
+        </p:nvSpPr>
+        <p:spPr/>
+        <p:txBody>
+          <a:bodyPr/>
+          <a:lstStyle/>
+          <a:p>
+            <a:fld id="{EB37DED6-D4C7-42EE-AB49-D2E39E64FDE4}" type="slidenum">
+              <a:rPr lang="en-US" smtClean="0"/>
+              <a:pPr/>
+              <a:t>11</a:t>
+            </a:fld>
+            <a:endParaRPr lang="en-US" dirty="0"/>
+          </a:p>
+        </p:txBody>
+      </p:sp>
+      <p:pic>
+        <p:nvPicPr>
+          <p:cNvPr id="6" name="Picture 5">
+            <a:extLst>
+              <a:ext uri="{FF2B5EF4-FFF2-40B4-BE49-F238E27FC236}">
+                <a16:creationId xmlns:a16="http://schemas.microsoft.com/office/drawing/2014/main" id="{484F1A4B-8B7C-D9D8-AC11-237CCD18704C}"/>
+              </a:ext>
+            </a:extLst>
+          </p:cNvPr>
+          <p:cNvPicPr>
+            <a:picLocks noChangeAspect="1"/>
+          </p:cNvPicPr>
+          <p:nvPr/>
+        </p:nvPicPr>
+        <p:blipFill>
+          <a:blip r:embed="rId2"/>
+          <a:stretch>
+            <a:fillRect/>
+          </a:stretch>
+        </p:blipFill>
+        <p:spPr>
+          <a:xfrm>
+            <a:off x="6627812" y="2181207"/>
+            <a:ext cx="4563353" cy="2495585"/>
+          </a:xfrm>
+          <a:prstGeom prst="rect">
+            <a:avLst/>
+          </a:prstGeom>
+        </p:spPr>
+      </p:pic>
+    </p:spTree>
+    <p:extLst>
+      <p:ext uri="{BB962C8B-B14F-4D97-AF65-F5344CB8AC3E}">
+        <p14:creationId xmlns:p14="http://schemas.microsoft.com/office/powerpoint/2010/main" val="2394351120"/>
+      </p:ext>
+    </p:extLst>
+  </p:cSld>
+  <p:clrMapOvr>
+    <a:masterClrMapping/>
+  </p:clrMapOvr>
+  <mc:AlternateContent xmlns:mc="http://schemas.openxmlformats.org/markup-compatibility/2006" xmlns:p14="http://schemas.microsoft.com/office/powerpoint/2010/main">
+    <mc:Choice Requires="p14">
+      <p:transition spd="med" p14:dur="700">
+        <p:fade/>
+      </p:transition>
+    </mc:Choice>
+    <mc:Fallback xmlns="">
+      <p:transition spd="med">
+        <p:fade/>
+      </p:transition>
+    </mc:Fallback>
+  </mc:AlternateContent>
+</p:sld>
+</file>
+
+<file path=ppt/slides/slide12.xml><?xml version="1.0" encoding="utf-8"?>
 <p:sld xmlns:a="http://schemas.openxmlformats.org/drawingml/2006/main" xmlns:r="http://schemas.openxmlformats.org/officeDocument/2006/relationships" xmlns:p="http://schemas.openxmlformats.org/presentationml/2006/main">
   <p:cSld>
     <p:spTree>
@@ -9239,34 +9934,6 @@
       </p:sp>
       <p:sp>
         <p:nvSpPr>
-          <p:cNvPr id="3" name="Table Placeholder 2">
-            <a:extLst>
-              <a:ext uri="{FF2B5EF4-FFF2-40B4-BE49-F238E27FC236}">
-                <a16:creationId xmlns:a16="http://schemas.microsoft.com/office/drawing/2014/main" id="{4C3716F6-3104-DBAE-5E89-6E5642E522CA}"/>
-              </a:ext>
-            </a:extLst>
-          </p:cNvPr>
-          <p:cNvSpPr>
-            <a:spLocks noGrp="1"/>
-          </p:cNvSpPr>
-          <p:nvPr>
-            <p:ph type="tbl" sz="quarter" idx="13"/>
-          </p:nvPr>
-        </p:nvSpPr>
-        <p:spPr/>
-        <p:txBody>
-          <a:bodyPr/>
-          <a:lstStyle/>
-          <a:p>
-            <a:r>
-              <a:rPr lang="en-US" dirty="0"/>
-              <a:t>while(condition; con</a:t>
-            </a:r>
-          </a:p>
-        </p:txBody>
-      </p:sp>
-      <p:sp>
-        <p:nvSpPr>
           <p:cNvPr id="4" name="Slide Number Placeholder 3">
             <a:extLst>
               <a:ext uri="{FF2B5EF4-FFF2-40B4-BE49-F238E27FC236}">
@@ -9289,12 +9956,72 @@
             <a:fld id="{EB37DED6-D4C7-42EE-AB49-D2E39E64FDE4}" type="slidenum">
               <a:rPr lang="en-US" smtClean="0"/>
               <a:pPr/>
-              <a:t>11</a:t>
+              <a:t>12</a:t>
             </a:fld>
             <a:endParaRPr lang="en-US" dirty="0"/>
           </a:p>
         </p:txBody>
       </p:sp>
+      <p:pic>
+        <p:nvPicPr>
+          <p:cNvPr id="14" name="Picture 13">
+            <a:extLst>
+              <a:ext uri="{FF2B5EF4-FFF2-40B4-BE49-F238E27FC236}">
+                <a16:creationId xmlns:a16="http://schemas.microsoft.com/office/drawing/2014/main" id="{327079E3-070C-D764-A003-8ABA551D12C5}"/>
+              </a:ext>
+            </a:extLst>
+          </p:cNvPr>
+          <p:cNvPicPr>
+            <a:picLocks noChangeAspect="1"/>
+          </p:cNvPicPr>
+          <p:nvPr/>
+        </p:nvPicPr>
+        <p:blipFill>
+          <a:blip r:embed="rId2"/>
+          <a:stretch>
+            <a:fillRect/>
+          </a:stretch>
+        </p:blipFill>
+        <p:spPr>
+          <a:xfrm>
+            <a:off x="1664056" y="1897380"/>
+            <a:ext cx="8618456" cy="1322832"/>
+          </a:xfrm>
+          <a:prstGeom prst="rect">
+            <a:avLst/>
+          </a:prstGeom>
+        </p:spPr>
+      </p:pic>
+      <p:pic>
+        <p:nvPicPr>
+          <p:cNvPr id="18" name="Picture 17">
+            <a:extLst>
+              <a:ext uri="{FF2B5EF4-FFF2-40B4-BE49-F238E27FC236}">
+                <a16:creationId xmlns:a16="http://schemas.microsoft.com/office/drawing/2014/main" id="{2E902159-ECCB-4121-89C8-31E27805B8D9}"/>
+              </a:ext>
+            </a:extLst>
+          </p:cNvPr>
+          <p:cNvPicPr>
+            <a:picLocks noChangeAspect="1"/>
+          </p:cNvPicPr>
+          <p:nvPr/>
+        </p:nvPicPr>
+        <p:blipFill>
+          <a:blip r:embed="rId3"/>
+          <a:stretch>
+            <a:fillRect/>
+          </a:stretch>
+        </p:blipFill>
+        <p:spPr>
+          <a:xfrm>
+            <a:off x="1594251" y="4038600"/>
+            <a:ext cx="8758067" cy="1322832"/>
+          </a:xfrm>
+          <a:prstGeom prst="rect">
+            <a:avLst/>
+          </a:prstGeom>
+        </p:spPr>
+      </p:pic>
     </p:spTree>
     <p:extLst>
       <p:ext uri="{BB962C8B-B14F-4D97-AF65-F5344CB8AC3E}">
@@ -9305,147 +10032,13 @@
   <p:clrMapOvr>
     <a:masterClrMapping/>
   </p:clrMapOvr>
-  <mc:AlternateContent xmlns:mc="http://schemas.openxmlformats.org/markup-compatibility/2006">
-    <mc:Choice xmlns:p14="http://schemas.microsoft.com/office/powerpoint/2010/main" Requires="p14">
+  <mc:AlternateContent xmlns:mc="http://schemas.openxmlformats.org/markup-compatibility/2006" xmlns:p14="http://schemas.microsoft.com/office/powerpoint/2010/main">
+    <mc:Choice Requires="p14">
       <p:transition spd="med" p14:dur="700">
         <p:fade/>
       </p:transition>
     </mc:Choice>
-    <mc:Fallback>
-      <p:transition spd="med">
-        <p:fade/>
-      </p:transition>
-    </mc:Fallback>
-  </mc:AlternateContent>
-</p:sld>
-</file>
-
-<file path=ppt/slides/slide12.xml><?xml version="1.0" encoding="utf-8"?>
-<p:sld xmlns:a="http://schemas.openxmlformats.org/drawingml/2006/main" xmlns:r="http://schemas.openxmlformats.org/officeDocument/2006/relationships" xmlns:p="http://schemas.openxmlformats.org/presentationml/2006/main">
-  <p:cSld>
-    <p:spTree>
-      <p:nvGrpSpPr>
-        <p:cNvPr id="1" name="">
-          <a:extLst>
-            <a:ext uri="{FF2B5EF4-FFF2-40B4-BE49-F238E27FC236}">
-              <a16:creationId xmlns:a16="http://schemas.microsoft.com/office/drawing/2014/main" id="{67EA70F3-14B4-40B5-A898-1A9C47322CC2}"/>
-            </a:ext>
-          </a:extLst>
-        </p:cNvPr>
-        <p:cNvGrpSpPr/>
-        <p:nvPr/>
-      </p:nvGrpSpPr>
-      <p:grpSpPr>
-        <a:xfrm>
-          <a:off x="0" y="0"/>
-          <a:ext cx="0" cy="0"/>
-          <a:chOff x="0" y="0"/>
-          <a:chExt cx="0" cy="0"/>
-        </a:xfrm>
-      </p:grpSpPr>
-      <p:sp>
-        <p:nvSpPr>
-          <p:cNvPr id="2" name="Title 1">
-            <a:extLst>
-              <a:ext uri="{FF2B5EF4-FFF2-40B4-BE49-F238E27FC236}">
-                <a16:creationId xmlns:a16="http://schemas.microsoft.com/office/drawing/2014/main" id="{2F0AE178-E686-DE7D-DF92-BEED4A3A2133}"/>
-              </a:ext>
-            </a:extLst>
-          </p:cNvPr>
-          <p:cNvSpPr>
-            <a:spLocks noGrp="1"/>
-          </p:cNvSpPr>
-          <p:nvPr>
-            <p:ph type="title"/>
-          </p:nvPr>
-        </p:nvSpPr>
-        <p:spPr/>
-        <p:txBody>
-          <a:bodyPr>
-            <a:normAutofit/>
-          </a:bodyPr>
-          <a:lstStyle/>
-          <a:p>
-            <a:pPr algn="ctr"/>
-            <a:r>
-              <a:rPr lang="en-US" sz="4400" dirty="0"/>
-              <a:t>Conditionals</a:t>
-            </a:r>
-          </a:p>
-        </p:txBody>
-      </p:sp>
-      <p:sp>
-        <p:nvSpPr>
-          <p:cNvPr id="3" name="Table Placeholder 2">
-            <a:extLst>
-              <a:ext uri="{FF2B5EF4-FFF2-40B4-BE49-F238E27FC236}">
-                <a16:creationId xmlns:a16="http://schemas.microsoft.com/office/drawing/2014/main" id="{833AC6AB-A0D7-479C-4DED-8F4335D906BF}"/>
-              </a:ext>
-            </a:extLst>
-          </p:cNvPr>
-          <p:cNvSpPr>
-            <a:spLocks noGrp="1"/>
-          </p:cNvSpPr>
-          <p:nvPr>
-            <p:ph type="tbl" sz="quarter" idx="13"/>
-          </p:nvPr>
-        </p:nvSpPr>
-        <p:spPr/>
-        <p:txBody>
-          <a:bodyPr/>
-          <a:lstStyle/>
-          <a:p>
-            <a:endParaRPr lang="en-US"/>
-          </a:p>
-        </p:txBody>
-      </p:sp>
-      <p:sp>
-        <p:nvSpPr>
-          <p:cNvPr id="4" name="Slide Number Placeholder 3">
-            <a:extLst>
-              <a:ext uri="{FF2B5EF4-FFF2-40B4-BE49-F238E27FC236}">
-                <a16:creationId xmlns:a16="http://schemas.microsoft.com/office/drawing/2014/main" id="{16FD730A-E531-663F-7EEE-FF5D5D726E55}"/>
-              </a:ext>
-            </a:extLst>
-          </p:cNvPr>
-          <p:cNvSpPr>
-            <a:spLocks noGrp="1"/>
-          </p:cNvSpPr>
-          <p:nvPr>
-            <p:ph type="sldNum" sz="quarter" idx="12"/>
-          </p:nvPr>
-        </p:nvSpPr>
-        <p:spPr/>
-        <p:txBody>
-          <a:bodyPr/>
-          <a:lstStyle/>
-          <a:p>
-            <a:fld id="{EB37DED6-D4C7-42EE-AB49-D2E39E64FDE4}" type="slidenum">
-              <a:rPr lang="en-US" smtClean="0"/>
-              <a:pPr/>
-              <a:t>12</a:t>
-            </a:fld>
-            <a:endParaRPr lang="en-US" dirty="0"/>
-          </a:p>
-        </p:txBody>
-      </p:sp>
-    </p:spTree>
-    <p:extLst>
-      <p:ext uri="{BB962C8B-B14F-4D97-AF65-F5344CB8AC3E}">
-        <p14:creationId xmlns:p14="http://schemas.microsoft.com/office/powerpoint/2010/main" val="2394351120"/>
-      </p:ext>
-    </p:extLst>
-  </p:cSld>
-  <p:clrMapOvr>
-    <a:masterClrMapping/>
-  </p:clrMapOvr>
-  <mc:AlternateContent xmlns:mc="http://schemas.openxmlformats.org/markup-compatibility/2006">
-    <mc:Choice xmlns:p14="http://schemas.microsoft.com/office/powerpoint/2010/main" Requires="p14">
-      <p:transition spd="med" p14:dur="700">
-        <p:fade/>
-      </p:transition>
-    </mc:Choice>
-    <mc:Fallback>
+    <mc:Fallback xmlns="">
       <p:transition spd="med">
         <p:fade/>
       </p:transition>
@@ -9462,7 +10055,7 @@
         <p:cNvPr id="1" name="">
           <a:extLst>
             <a:ext uri="{FF2B5EF4-FFF2-40B4-BE49-F238E27FC236}">
-              <a16:creationId xmlns:a16="http://schemas.microsoft.com/office/drawing/2014/main" id="{98E2C1EE-2129-9DE5-8B3F-A3D7BD80A151}"/>
+              <a16:creationId xmlns:a16="http://schemas.microsoft.com/office/drawing/2014/main" id="{23901227-E2CE-A046-CC9A-968E8464CC3E}"/>
             </a:ext>
           </a:extLst>
         </p:cNvPr>
@@ -9482,7 +10075,7 @@
           <p:cNvPr id="2" name="Title 1">
             <a:extLst>
               <a:ext uri="{FF2B5EF4-FFF2-40B4-BE49-F238E27FC236}">
-                <a16:creationId xmlns:a16="http://schemas.microsoft.com/office/drawing/2014/main" id="{789DCF74-8E21-4A97-C3A5-83205058B792}"/>
+                <a16:creationId xmlns:a16="http://schemas.microsoft.com/office/drawing/2014/main" id="{744ED615-EE4B-B36A-E842-0BEC23C1000B}"/>
               </a:ext>
             </a:extLst>
           </p:cNvPr>
@@ -9503,33 +10096,8 @@
             <a:pPr algn="ctr"/>
             <a:r>
               <a:rPr lang="en-US" sz="4400" dirty="0"/>
-              <a:t>Functions</a:t>
-            </a:r>
-          </a:p>
-        </p:txBody>
-      </p:sp>
-      <p:sp>
-        <p:nvSpPr>
-          <p:cNvPr id="3" name="Table Placeholder 2">
-            <a:extLst>
-              <a:ext uri="{FF2B5EF4-FFF2-40B4-BE49-F238E27FC236}">
-                <a16:creationId xmlns:a16="http://schemas.microsoft.com/office/drawing/2014/main" id="{EA875BA9-AE56-A82F-312B-3CD5B4991C55}"/>
-              </a:ext>
-            </a:extLst>
-          </p:cNvPr>
-          <p:cNvSpPr>
-            <a:spLocks noGrp="1"/>
-          </p:cNvSpPr>
-          <p:nvPr>
-            <p:ph type="tbl" sz="quarter" idx="13"/>
-          </p:nvPr>
-        </p:nvSpPr>
-        <p:spPr/>
-        <p:txBody>
-          <a:bodyPr/>
-          <a:lstStyle/>
-          <a:p>
-            <a:endParaRPr lang="en-US"/>
+              <a:t>Loops</a:t>
+            </a:r>
           </a:p>
         </p:txBody>
       </p:sp>
@@ -9538,7 +10106,7 @@
           <p:cNvPr id="4" name="Slide Number Placeholder 3">
             <a:extLst>
               <a:ext uri="{FF2B5EF4-FFF2-40B4-BE49-F238E27FC236}">
-                <a16:creationId xmlns:a16="http://schemas.microsoft.com/office/drawing/2014/main" id="{BADF8F97-52A9-BE57-1ED2-A33B0CFADFDE}"/>
+                <a16:creationId xmlns:a16="http://schemas.microsoft.com/office/drawing/2014/main" id="{2607454B-2ACC-4B70-819C-63167CFF06CC}"/>
               </a:ext>
             </a:extLst>
           </p:cNvPr>
@@ -9563,10 +10131,40 @@
           </a:p>
         </p:txBody>
       </p:sp>
+      <p:pic>
+        <p:nvPicPr>
+          <p:cNvPr id="12" name="Picture 11">
+            <a:extLst>
+              <a:ext uri="{FF2B5EF4-FFF2-40B4-BE49-F238E27FC236}">
+                <a16:creationId xmlns:a16="http://schemas.microsoft.com/office/drawing/2014/main" id="{1A2629EB-82B2-9FF4-6A21-E07809BC1BD3}"/>
+              </a:ext>
+            </a:extLst>
+          </p:cNvPr>
+          <p:cNvPicPr>
+            <a:picLocks noChangeAspect="1"/>
+          </p:cNvPicPr>
+          <p:nvPr/>
+        </p:nvPicPr>
+        <p:blipFill>
+          <a:blip r:embed="rId2"/>
+          <a:stretch>
+            <a:fillRect/>
+          </a:stretch>
+        </p:blipFill>
+        <p:spPr>
+          <a:xfrm>
+            <a:off x="3366848" y="2033050"/>
+            <a:ext cx="5455127" cy="3648388"/>
+          </a:xfrm>
+          <a:prstGeom prst="rect">
+            <a:avLst/>
+          </a:prstGeom>
+        </p:spPr>
+      </p:pic>
     </p:spTree>
     <p:extLst>
       <p:ext uri="{BB962C8B-B14F-4D97-AF65-F5344CB8AC3E}">
-        <p14:creationId xmlns:p14="http://schemas.microsoft.com/office/powerpoint/2010/main" val="3320159408"/>
+        <p14:creationId xmlns:p14="http://schemas.microsoft.com/office/powerpoint/2010/main" val="937413884"/>
       </p:ext>
     </p:extLst>
   </p:cSld>
@@ -9596,7 +10194,7 @@
         <p:cNvPr id="1" name="">
           <a:extLst>
             <a:ext uri="{FF2B5EF4-FFF2-40B4-BE49-F238E27FC236}">
-              <a16:creationId xmlns:a16="http://schemas.microsoft.com/office/drawing/2014/main" id="{752EC9D9-C6E8-011F-B51E-A122E5DFCA5B}"/>
+              <a16:creationId xmlns:a16="http://schemas.microsoft.com/office/drawing/2014/main" id="{AED153C2-7114-EEA1-DF37-1011D020D5E5}"/>
             </a:ext>
           </a:extLst>
         </p:cNvPr>
@@ -9616,7 +10214,7 @@
           <p:cNvPr id="2" name="Title 1">
             <a:extLst>
               <a:ext uri="{FF2B5EF4-FFF2-40B4-BE49-F238E27FC236}">
-                <a16:creationId xmlns:a16="http://schemas.microsoft.com/office/drawing/2014/main" id="{87297FB0-7861-91F9-901A-95B5A5798048}"/>
+                <a16:creationId xmlns:a16="http://schemas.microsoft.com/office/drawing/2014/main" id="{D5300007-0C6D-BA41-B23A-BC68097E01DB}"/>
               </a:ext>
             </a:extLst>
           </p:cNvPr>
@@ -9637,33 +10235,8 @@
             <a:pPr algn="ctr"/>
             <a:r>
               <a:rPr lang="en-US" sz="4400" dirty="0"/>
-              <a:t>Libraries</a:t>
-            </a:r>
-          </a:p>
-        </p:txBody>
-      </p:sp>
-      <p:sp>
-        <p:nvSpPr>
-          <p:cNvPr id="3" name="Table Placeholder 2">
-            <a:extLst>
-              <a:ext uri="{FF2B5EF4-FFF2-40B4-BE49-F238E27FC236}">
-                <a16:creationId xmlns:a16="http://schemas.microsoft.com/office/drawing/2014/main" id="{E4E51146-0EB3-530A-888F-E719E1C64DFB}"/>
-              </a:ext>
-            </a:extLst>
-          </p:cNvPr>
-          <p:cNvSpPr>
-            <a:spLocks noGrp="1"/>
-          </p:cNvSpPr>
-          <p:nvPr>
-            <p:ph type="tbl" sz="quarter" idx="13"/>
-          </p:nvPr>
-        </p:nvSpPr>
-        <p:spPr/>
-        <p:txBody>
-          <a:bodyPr/>
-          <a:lstStyle/>
-          <a:p>
-            <a:endParaRPr lang="en-US"/>
+              <a:t>Loops</a:t>
+            </a:r>
           </a:p>
         </p:txBody>
       </p:sp>
@@ -9672,7 +10245,7 @@
           <p:cNvPr id="4" name="Slide Number Placeholder 3">
             <a:extLst>
               <a:ext uri="{FF2B5EF4-FFF2-40B4-BE49-F238E27FC236}">
-                <a16:creationId xmlns:a16="http://schemas.microsoft.com/office/drawing/2014/main" id="{763B805F-BD0C-6B4C-119D-BA3E02A4E15C}"/>
+                <a16:creationId xmlns:a16="http://schemas.microsoft.com/office/drawing/2014/main" id="{A123A130-52B7-9788-5175-BDF372CBE2C3}"/>
               </a:ext>
             </a:extLst>
           </p:cNvPr>
@@ -9697,10 +10270,40 @@
           </a:p>
         </p:txBody>
       </p:sp>
+      <p:pic>
+        <p:nvPicPr>
+          <p:cNvPr id="7" name="Picture 6">
+            <a:extLst>
+              <a:ext uri="{FF2B5EF4-FFF2-40B4-BE49-F238E27FC236}">
+                <a16:creationId xmlns:a16="http://schemas.microsoft.com/office/drawing/2014/main" id="{D270FAAC-1AF2-91C8-B6D2-1608CE3B4CD1}"/>
+              </a:ext>
+            </a:extLst>
+          </p:cNvPr>
+          <p:cNvPicPr>
+            <a:picLocks noChangeAspect="1"/>
+          </p:cNvPicPr>
+          <p:nvPr/>
+        </p:nvPicPr>
+        <p:blipFill>
+          <a:blip r:embed="rId2"/>
+          <a:stretch>
+            <a:fillRect/>
+          </a:stretch>
+        </p:blipFill>
+        <p:spPr>
+          <a:xfrm>
+            <a:off x="2752629" y="2057400"/>
+            <a:ext cx="6441312" cy="3457628"/>
+          </a:xfrm>
+          <a:prstGeom prst="rect">
+            <a:avLst/>
+          </a:prstGeom>
+        </p:spPr>
+      </p:pic>
     </p:spTree>
     <p:extLst>
       <p:ext uri="{BB962C8B-B14F-4D97-AF65-F5344CB8AC3E}">
-        <p14:creationId xmlns:p14="http://schemas.microsoft.com/office/powerpoint/2010/main" val="4119718190"/>
+        <p14:creationId xmlns:p14="http://schemas.microsoft.com/office/powerpoint/2010/main" val="3393081928"/>
       </p:ext>
     </p:extLst>
   </p:cSld>
@@ -9730,7 +10333,7 @@
         <p:cNvPr id="1" name="">
           <a:extLst>
             <a:ext uri="{FF2B5EF4-FFF2-40B4-BE49-F238E27FC236}">
-              <a16:creationId xmlns:a16="http://schemas.microsoft.com/office/drawing/2014/main" id="{A0BA085F-9EFF-9AC7-E5CD-BEAE8BAA0B8A}"/>
+              <a16:creationId xmlns:a16="http://schemas.microsoft.com/office/drawing/2014/main" id="{98E2C1EE-2129-9DE5-8B3F-A3D7BD80A151}"/>
             </a:ext>
           </a:extLst>
         </p:cNvPr>
@@ -9750,7 +10353,7 @@
           <p:cNvPr id="2" name="Title 1">
             <a:extLst>
               <a:ext uri="{FF2B5EF4-FFF2-40B4-BE49-F238E27FC236}">
-                <a16:creationId xmlns:a16="http://schemas.microsoft.com/office/drawing/2014/main" id="{92AA717B-3214-DDE8-397B-EBC6C96D278B}"/>
+                <a16:creationId xmlns:a16="http://schemas.microsoft.com/office/drawing/2014/main" id="{789DCF74-8E21-4A97-C3A5-83205058B792}"/>
               </a:ext>
             </a:extLst>
           </p:cNvPr>
@@ -9771,7 +10374,7 @@
             <a:pPr algn="ctr"/>
             <a:r>
               <a:rPr lang="en-US" sz="4400" dirty="0"/>
-              <a:t>Header &amp; Implementation Files</a:t>
+              <a:t>Functions</a:t>
             </a:r>
           </a:p>
         </p:txBody>
@@ -9781,7 +10384,7 @@
           <p:cNvPr id="3" name="Table Placeholder 2">
             <a:extLst>
               <a:ext uri="{FF2B5EF4-FFF2-40B4-BE49-F238E27FC236}">
-                <a16:creationId xmlns:a16="http://schemas.microsoft.com/office/drawing/2014/main" id="{738BF853-96CC-B028-2738-3BF0C35CDA93}"/>
+                <a16:creationId xmlns:a16="http://schemas.microsoft.com/office/drawing/2014/main" id="{EA875BA9-AE56-A82F-312B-3CD5B4991C55}"/>
               </a:ext>
             </a:extLst>
           </p:cNvPr>
@@ -9794,10 +10397,51 @@
         </p:nvSpPr>
         <p:spPr/>
         <p:txBody>
-          <a:bodyPr/>
+          <a:bodyPr>
+            <a:normAutofit fontScale="92500" lnSpcReduction="20000"/>
+          </a:bodyPr>
           <a:lstStyle/>
           <a:p>
-            <a:endParaRPr lang="en-US"/>
+            <a:r>
+              <a:rPr lang="en-US" dirty="0"/>
+              <a:t>Take 0 or more inputs, return 0 or 1 outputs</a:t>
+            </a:r>
+          </a:p>
+          <a:p>
+            <a:r>
+              <a:rPr lang="en-US" dirty="0"/>
+              <a:t>Useful when you want to do the same action to different inputs or do a variation of some action based on an input</a:t>
+            </a:r>
+          </a:p>
+          <a:p>
+            <a:r>
+              <a:rPr lang="en-US" dirty="0"/>
+              <a:t>Inputs and output types must be specified</a:t>
+            </a:r>
+          </a:p>
+          <a:p>
+            <a:r>
+              <a:rPr lang="en-US" dirty="0"/>
+              <a:t>Loop and void are examples of functions!</a:t>
+            </a:r>
+          </a:p>
+          <a:p>
+            <a:r>
+              <a:rPr lang="en-US" dirty="0"/>
+              <a:t>We can use functions written by other people by importing libraries</a:t>
+            </a:r>
+          </a:p>
+          <a:p>
+            <a:r>
+              <a:rPr lang="en-US" dirty="0"/>
+              <a:t>We can also make our own functions either in the same code file or in separate header and implementation files</a:t>
+            </a:r>
+          </a:p>
+          <a:p>
+            <a:r>
+              <a:rPr lang="en-US" dirty="0"/>
+              <a:t>Function declaration must come before usage.</a:t>
+            </a:r>
           </a:p>
         </p:txBody>
       </p:sp>
@@ -9806,7 +10450,7 @@
           <p:cNvPr id="4" name="Slide Number Placeholder 3">
             <a:extLst>
               <a:ext uri="{FF2B5EF4-FFF2-40B4-BE49-F238E27FC236}">
-                <a16:creationId xmlns:a16="http://schemas.microsoft.com/office/drawing/2014/main" id="{5EBF708A-A38B-D8C8-354E-01CE26B1EC8D}"/>
+                <a16:creationId xmlns:a16="http://schemas.microsoft.com/office/drawing/2014/main" id="{BADF8F97-52A9-BE57-1ED2-A33B0CFADFDE}"/>
               </a:ext>
             </a:extLst>
           </p:cNvPr>
@@ -9834,7 +10478,156 @@
     </p:spTree>
     <p:extLst>
       <p:ext uri="{BB962C8B-B14F-4D97-AF65-F5344CB8AC3E}">
-        <p14:creationId xmlns:p14="http://schemas.microsoft.com/office/powerpoint/2010/main" val="3808367869"/>
+        <p14:creationId xmlns:p14="http://schemas.microsoft.com/office/powerpoint/2010/main" val="3320159408"/>
+      </p:ext>
+    </p:extLst>
+  </p:cSld>
+  <p:clrMapOvr>
+    <a:masterClrMapping/>
+  </p:clrMapOvr>
+  <mc:AlternateContent xmlns:mc="http://schemas.openxmlformats.org/markup-compatibility/2006" xmlns:p14="http://schemas.microsoft.com/office/powerpoint/2010/main">
+    <mc:Choice Requires="p14">
+      <p:transition spd="med" p14:dur="700">
+        <p:fade/>
+      </p:transition>
+    </mc:Choice>
+    <mc:Fallback xmlns="">
+      <p:transition spd="med">
+        <p:fade/>
+      </p:transition>
+    </mc:Fallback>
+  </mc:AlternateContent>
+</p:sld>
+</file>
+
+<file path=ppt/slides/slide16.xml><?xml version="1.0" encoding="utf-8"?>
+<p:sld xmlns:a="http://schemas.openxmlformats.org/drawingml/2006/main" xmlns:r="http://schemas.openxmlformats.org/officeDocument/2006/relationships" xmlns:p="http://schemas.openxmlformats.org/presentationml/2006/main">
+  <p:cSld>
+    <p:spTree>
+      <p:nvGrpSpPr>
+        <p:cNvPr id="1" name="">
+          <a:extLst>
+            <a:ext uri="{FF2B5EF4-FFF2-40B4-BE49-F238E27FC236}">
+              <a16:creationId xmlns:a16="http://schemas.microsoft.com/office/drawing/2014/main" id="{E569ACC6-7FFC-9795-0292-D60662E9C336}"/>
+            </a:ext>
+          </a:extLst>
+        </p:cNvPr>
+        <p:cNvGrpSpPr/>
+        <p:nvPr/>
+      </p:nvGrpSpPr>
+      <p:grpSpPr>
+        <a:xfrm>
+          <a:off x="0" y="0"/>
+          <a:ext cx="0" cy="0"/>
+          <a:chOff x="0" y="0"/>
+          <a:chExt cx="0" cy="0"/>
+        </a:xfrm>
+      </p:grpSpPr>
+      <p:sp>
+        <p:nvSpPr>
+          <p:cNvPr id="2" name="Title 1">
+            <a:extLst>
+              <a:ext uri="{FF2B5EF4-FFF2-40B4-BE49-F238E27FC236}">
+                <a16:creationId xmlns:a16="http://schemas.microsoft.com/office/drawing/2014/main" id="{EBB6278E-DB15-9F66-EB9C-C082E185B7AD}"/>
+              </a:ext>
+            </a:extLst>
+          </p:cNvPr>
+          <p:cNvSpPr>
+            <a:spLocks noGrp="1"/>
+          </p:cNvSpPr>
+          <p:nvPr>
+            <p:ph type="title"/>
+          </p:nvPr>
+        </p:nvSpPr>
+        <p:spPr/>
+        <p:txBody>
+          <a:bodyPr>
+            <a:normAutofit/>
+          </a:bodyPr>
+          <a:lstStyle/>
+          <a:p>
+            <a:pPr algn="ctr"/>
+            <a:r>
+              <a:rPr lang="en-US" sz="4400" dirty="0"/>
+              <a:t>Classes &amp; Structs</a:t>
+            </a:r>
+          </a:p>
+        </p:txBody>
+      </p:sp>
+      <p:sp>
+        <p:nvSpPr>
+          <p:cNvPr id="3" name="Table Placeholder 2">
+            <a:extLst>
+              <a:ext uri="{FF2B5EF4-FFF2-40B4-BE49-F238E27FC236}">
+                <a16:creationId xmlns:a16="http://schemas.microsoft.com/office/drawing/2014/main" id="{0D8A8798-7545-DFDE-F594-605768619AC0}"/>
+              </a:ext>
+            </a:extLst>
+          </p:cNvPr>
+          <p:cNvSpPr>
+            <a:spLocks noGrp="1"/>
+          </p:cNvSpPr>
+          <p:nvPr>
+            <p:ph type="tbl" sz="quarter" idx="13"/>
+          </p:nvPr>
+        </p:nvSpPr>
+        <p:spPr/>
+        <p:txBody>
+          <a:bodyPr/>
+          <a:lstStyle/>
+          <a:p>
+            <a:r>
+              <a:rPr lang="en-US" dirty="0"/>
+              <a:t>Keep data together in a package that is easily accessible and optionally modifiable</a:t>
+            </a:r>
+          </a:p>
+          <a:p>
+            <a:r>
+              <a:rPr lang="en-US" dirty="0"/>
+              <a:t>Has properties and functions. </a:t>
+            </a:r>
+          </a:p>
+          <a:p>
+            <a:r>
+              <a:rPr lang="en-US" dirty="0"/>
+              <a:t>Example: dog class could have properties of color, breed, age and functions eat, sleep, bark</a:t>
+            </a:r>
+          </a:p>
+        </p:txBody>
+      </p:sp>
+      <p:sp>
+        <p:nvSpPr>
+          <p:cNvPr id="4" name="Slide Number Placeholder 3">
+            <a:extLst>
+              <a:ext uri="{FF2B5EF4-FFF2-40B4-BE49-F238E27FC236}">
+                <a16:creationId xmlns:a16="http://schemas.microsoft.com/office/drawing/2014/main" id="{646E724A-E14F-0D59-0F3E-1BE11275304B}"/>
+              </a:ext>
+            </a:extLst>
+          </p:cNvPr>
+          <p:cNvSpPr>
+            <a:spLocks noGrp="1"/>
+          </p:cNvSpPr>
+          <p:nvPr>
+            <p:ph type="sldNum" sz="quarter" idx="12"/>
+          </p:nvPr>
+        </p:nvSpPr>
+        <p:spPr/>
+        <p:txBody>
+          <a:bodyPr/>
+          <a:lstStyle/>
+          <a:p>
+            <a:fld id="{EB37DED6-D4C7-42EE-AB49-D2E39E64FDE4}" type="slidenum">
+              <a:rPr lang="en-US" smtClean="0"/>
+              <a:pPr/>
+              <a:t>16</a:t>
+            </a:fld>
+            <a:endParaRPr lang="en-US" dirty="0"/>
+          </a:p>
+        </p:txBody>
+      </p:sp>
+    </p:spTree>
+    <p:extLst>
+      <p:ext uri="{BB962C8B-B14F-4D97-AF65-F5344CB8AC3E}">
+        <p14:creationId xmlns:p14="http://schemas.microsoft.com/office/powerpoint/2010/main" val="2133475131"/>
       </p:ext>
     </p:extLst>
   </p:cSld>
@@ -9856,7 +10649,177 @@
 </p:sld>
 </file>
 
-<file path=ppt/slides/slide16.xml><?xml version="1.0" encoding="utf-8"?>
+<file path=ppt/slides/slide17.xml><?xml version="1.0" encoding="utf-8"?>
+<p:sld xmlns:a="http://schemas.openxmlformats.org/drawingml/2006/main" xmlns:r="http://schemas.openxmlformats.org/officeDocument/2006/relationships" xmlns:p="http://schemas.openxmlformats.org/presentationml/2006/main">
+  <p:cSld>
+    <p:spTree>
+      <p:nvGrpSpPr>
+        <p:cNvPr id="1" name="">
+          <a:extLst>
+            <a:ext uri="{FF2B5EF4-FFF2-40B4-BE49-F238E27FC236}">
+              <a16:creationId xmlns:a16="http://schemas.microsoft.com/office/drawing/2014/main" id="{752EC9D9-C6E8-011F-B51E-A122E5DFCA5B}"/>
+            </a:ext>
+          </a:extLst>
+        </p:cNvPr>
+        <p:cNvGrpSpPr/>
+        <p:nvPr/>
+      </p:nvGrpSpPr>
+      <p:grpSpPr>
+        <a:xfrm>
+          <a:off x="0" y="0"/>
+          <a:ext cx="0" cy="0"/>
+          <a:chOff x="0" y="0"/>
+          <a:chExt cx="0" cy="0"/>
+        </a:xfrm>
+      </p:grpSpPr>
+      <p:sp>
+        <p:nvSpPr>
+          <p:cNvPr id="2" name="Title 1">
+            <a:extLst>
+              <a:ext uri="{FF2B5EF4-FFF2-40B4-BE49-F238E27FC236}">
+                <a16:creationId xmlns:a16="http://schemas.microsoft.com/office/drawing/2014/main" id="{87297FB0-7861-91F9-901A-95B5A5798048}"/>
+              </a:ext>
+            </a:extLst>
+          </p:cNvPr>
+          <p:cNvSpPr>
+            <a:spLocks noGrp="1"/>
+          </p:cNvSpPr>
+          <p:nvPr>
+            <p:ph type="title"/>
+          </p:nvPr>
+        </p:nvSpPr>
+        <p:spPr/>
+        <p:txBody>
+          <a:bodyPr>
+            <a:normAutofit/>
+          </a:bodyPr>
+          <a:lstStyle/>
+          <a:p>
+            <a:pPr algn="ctr"/>
+            <a:r>
+              <a:rPr lang="en-US" sz="4400" dirty="0"/>
+              <a:t>Libraries</a:t>
+            </a:r>
+          </a:p>
+        </p:txBody>
+      </p:sp>
+      <p:sp>
+        <p:nvSpPr>
+          <p:cNvPr id="3" name="Table Placeholder 2">
+            <a:extLst>
+              <a:ext uri="{FF2B5EF4-FFF2-40B4-BE49-F238E27FC236}">
+                <a16:creationId xmlns:a16="http://schemas.microsoft.com/office/drawing/2014/main" id="{E4E51146-0EB3-530A-888F-E719E1C64DFB}"/>
+              </a:ext>
+            </a:extLst>
+          </p:cNvPr>
+          <p:cNvSpPr>
+            <a:spLocks noGrp="1"/>
+          </p:cNvSpPr>
+          <p:nvPr>
+            <p:ph type="tbl" sz="quarter" idx="13"/>
+          </p:nvPr>
+        </p:nvSpPr>
+        <p:spPr/>
+        <p:txBody>
+          <a:bodyPr/>
+          <a:lstStyle/>
+          <a:p>
+            <a:r>
+              <a:rPr lang="en-US" dirty="0"/>
+              <a:t>Use other people’s functions &amp; data structures (classes or structs)</a:t>
+            </a:r>
+          </a:p>
+          <a:p>
+            <a:r>
+              <a:rPr lang="en-US" dirty="0"/>
+              <a:t>Download from Library manager</a:t>
+            </a:r>
+          </a:p>
+          <a:p>
+            <a:r>
+              <a:rPr lang="en-US" dirty="0"/>
+              <a:t>#include &lt;</a:t>
+            </a:r>
+            <a:r>
+              <a:rPr lang="en-US" dirty="0" err="1"/>
+              <a:t>libname.h</a:t>
+            </a:r>
+            <a:r>
+              <a:rPr lang="en-US" dirty="0"/>
+              <a:t>&gt;</a:t>
+            </a:r>
+          </a:p>
+          <a:p>
+            <a:r>
+              <a:rPr lang="en-US" dirty="0"/>
+              <a:t>We can write our own libraries (header and implementation files) that include classes &amp; functions that we want to reuse over and over</a:t>
+            </a:r>
+          </a:p>
+          <a:p>
+            <a:pPr lvl="1"/>
+            <a:r>
+              <a:rPr lang="en-US" dirty="0"/>
+              <a:t>Will talk about that later</a:t>
+            </a:r>
+          </a:p>
+        </p:txBody>
+      </p:sp>
+      <p:sp>
+        <p:nvSpPr>
+          <p:cNvPr id="4" name="Slide Number Placeholder 3">
+            <a:extLst>
+              <a:ext uri="{FF2B5EF4-FFF2-40B4-BE49-F238E27FC236}">
+                <a16:creationId xmlns:a16="http://schemas.microsoft.com/office/drawing/2014/main" id="{763B805F-BD0C-6B4C-119D-BA3E02A4E15C}"/>
+              </a:ext>
+            </a:extLst>
+          </p:cNvPr>
+          <p:cNvSpPr>
+            <a:spLocks noGrp="1"/>
+          </p:cNvSpPr>
+          <p:nvPr>
+            <p:ph type="sldNum" sz="quarter" idx="12"/>
+          </p:nvPr>
+        </p:nvSpPr>
+        <p:spPr/>
+        <p:txBody>
+          <a:bodyPr/>
+          <a:lstStyle/>
+          <a:p>
+            <a:fld id="{EB37DED6-D4C7-42EE-AB49-D2E39E64FDE4}" type="slidenum">
+              <a:rPr lang="en-US" smtClean="0"/>
+              <a:pPr/>
+              <a:t>17</a:t>
+            </a:fld>
+            <a:endParaRPr lang="en-US" dirty="0"/>
+          </a:p>
+        </p:txBody>
+      </p:sp>
+    </p:spTree>
+    <p:extLst>
+      <p:ext uri="{BB962C8B-B14F-4D97-AF65-F5344CB8AC3E}">
+        <p14:creationId xmlns:p14="http://schemas.microsoft.com/office/powerpoint/2010/main" val="4119718190"/>
+      </p:ext>
+    </p:extLst>
+  </p:cSld>
+  <p:clrMapOvr>
+    <a:masterClrMapping/>
+  </p:clrMapOvr>
+  <mc:AlternateContent xmlns:mc="http://schemas.openxmlformats.org/markup-compatibility/2006" xmlns:p14="http://schemas.microsoft.com/office/powerpoint/2010/main">
+    <mc:Choice Requires="p14">
+      <p:transition spd="med" p14:dur="700">
+        <p:fade/>
+      </p:transition>
+    </mc:Choice>
+    <mc:Fallback xmlns="">
+      <p:transition spd="med">
+        <p:fade/>
+      </p:transition>
+    </mc:Fallback>
+  </mc:AlternateContent>
+</p:sld>
+</file>
+
+<file path=ppt/slides/slide18.xml><?xml version="1.0" encoding="utf-8"?>
 <p:sld xmlns:a="http://schemas.openxmlformats.org/drawingml/2006/main" xmlns:r="http://schemas.openxmlformats.org/officeDocument/2006/relationships" xmlns:p="http://schemas.openxmlformats.org/presentationml/2006/main">
   <p:cSld>
     <p:spTree>
@@ -9927,7 +10890,7 @@
 </p:sld>
 </file>
 
-<file path=ppt/slides/slide17.xml><?xml version="1.0" encoding="utf-8"?>
+<file path=ppt/slides/slide19.xml><?xml version="1.0" encoding="utf-8"?>
 <p:sld xmlns:a="http://schemas.openxmlformats.org/drawingml/2006/main" xmlns:r="http://schemas.openxmlformats.org/officeDocument/2006/relationships" xmlns:p="http://schemas.openxmlformats.org/presentationml/2006/main">
   <p:cSld>
     <p:spTree>
@@ -10005,7 +10968,7 @@
             <a:fld id="{EB37DED6-D4C7-42EE-AB49-D2E39E64FDE4}" type="slidenum">
               <a:rPr lang="en-US" smtClean="0"/>
               <a:pPr/>
-              <a:t>17</a:t>
+              <a:t>19</a:t>
             </a:fld>
             <a:endParaRPr lang="en-US" dirty="0"/>
           </a:p>
@@ -10081,13 +11044,13 @@
   <p:clrMapOvr>
     <a:masterClrMapping/>
   </p:clrMapOvr>
-  <mc:AlternateContent xmlns:mc="http://schemas.openxmlformats.org/markup-compatibility/2006">
-    <mc:Choice xmlns:p14="http://schemas.microsoft.com/office/powerpoint/2010/main" Requires="p14">
+  <mc:AlternateContent xmlns:mc="http://schemas.openxmlformats.org/markup-compatibility/2006" xmlns:p14="http://schemas.microsoft.com/office/powerpoint/2010/main">
+    <mc:Choice Requires="p14">
       <p:transition spd="med" p14:dur="700">
         <p:fade/>
       </p:transition>
     </mc:Choice>
-    <mc:Fallback>
+    <mc:Fallback xmlns="">
       <p:transition spd="med">
         <p:fade/>
       </p:transition>
@@ -10096,18 +11059,12 @@
 </p:sld>
 </file>
 
-<file path=ppt/slides/slide18.xml><?xml version="1.0" encoding="utf-8"?>
+<file path=ppt/slides/slide2.xml><?xml version="1.0" encoding="utf-8"?>
 <p:sld xmlns:a="http://schemas.openxmlformats.org/drawingml/2006/main" xmlns:r="http://schemas.openxmlformats.org/officeDocument/2006/relationships" xmlns:p="http://schemas.openxmlformats.org/presentationml/2006/main">
   <p:cSld>
     <p:spTree>
       <p:nvGrpSpPr>
-        <p:cNvPr id="1" name="">
-          <a:extLst>
-            <a:ext uri="{FF2B5EF4-FFF2-40B4-BE49-F238E27FC236}">
-              <a16:creationId xmlns:a16="http://schemas.microsoft.com/office/drawing/2014/main" id="{7FC51280-82AB-8435-A317-44078A25BF2B}"/>
-            </a:ext>
-          </a:extLst>
-        </p:cNvPr>
+        <p:cNvPr id="1" name=""/>
         <p:cNvGrpSpPr/>
         <p:nvPr/>
       </p:nvGrpSpPr>
@@ -10124,7 +11081,7 @@
           <p:cNvPr id="2" name="Title 1">
             <a:extLst>
               <a:ext uri="{FF2B5EF4-FFF2-40B4-BE49-F238E27FC236}">
-                <a16:creationId xmlns:a16="http://schemas.microsoft.com/office/drawing/2014/main" id="{BCFD80C2-B399-9EB8-8E3E-45AD5FA38883}"/>
+                <a16:creationId xmlns:a16="http://schemas.microsoft.com/office/drawing/2014/main" id="{F0DB7DC9-F6E2-F1D6-FAB2-13C163FD8388}"/>
               </a:ext>
             </a:extLst>
           </p:cNvPr>
@@ -10137,100 +11094,37 @@
         </p:nvSpPr>
         <p:spPr/>
         <p:txBody>
-          <a:bodyPr>
-            <a:normAutofit/>
-          </a:bodyPr>
-          <a:lstStyle/>
-          <a:p>
-            <a:pPr algn="ctr"/>
-            <a:r>
-              <a:rPr lang="en-US" sz="4400" dirty="0"/>
-              <a:t>Ground &amp; Power Rails</a:t>
-            </a:r>
-          </a:p>
-        </p:txBody>
-      </p:sp>
-      <p:sp>
-        <p:nvSpPr>
-          <p:cNvPr id="3" name="Table Placeholder 2">
-            <a:extLst>
-              <a:ext uri="{FF2B5EF4-FFF2-40B4-BE49-F238E27FC236}">
-                <a16:creationId xmlns:a16="http://schemas.microsoft.com/office/drawing/2014/main" id="{AA5E01C1-8AFF-0C70-A590-CCD9F439C21D}"/>
-              </a:ext>
-            </a:extLst>
-          </p:cNvPr>
-          <p:cNvSpPr>
-            <a:spLocks noGrp="1"/>
-          </p:cNvSpPr>
-          <p:nvPr>
-            <p:ph type="tbl" sz="quarter" idx="13"/>
-          </p:nvPr>
-        </p:nvSpPr>
-        <p:spPr/>
-        <p:txBody>
           <a:bodyPr/>
           <a:lstStyle/>
           <a:p>
-            <a:endParaRPr lang="en-US"/>
-          </a:p>
-        </p:txBody>
-      </p:sp>
-      <p:sp>
-        <p:nvSpPr>
-          <p:cNvPr id="4" name="Slide Number Placeholder 3">
-            <a:extLst>
-              <a:ext uri="{FF2B5EF4-FFF2-40B4-BE49-F238E27FC236}">
-                <a16:creationId xmlns:a16="http://schemas.microsoft.com/office/drawing/2014/main" id="{96F24F69-8E71-A57B-F3A8-8FD8E6BB1A5E}"/>
-              </a:ext>
-            </a:extLst>
-          </p:cNvPr>
-          <p:cNvSpPr>
-            <a:spLocks noGrp="1"/>
-          </p:cNvSpPr>
-          <p:nvPr>
-            <p:ph type="sldNum" sz="quarter" idx="12"/>
-          </p:nvPr>
-        </p:nvSpPr>
-        <p:spPr/>
-        <p:txBody>
-          <a:bodyPr/>
-          <a:lstStyle/>
-          <a:p>
-            <a:fld id="{EB37DED6-D4C7-42EE-AB49-D2E39E64FDE4}" type="slidenum">
-              <a:rPr lang="en-US" smtClean="0"/>
-              <a:pPr/>
-              <a:t>18</a:t>
-            </a:fld>
-            <a:endParaRPr lang="en-US" dirty="0"/>
+            <a:r>
+              <a:rPr lang="en-US" dirty="0">
+                <a:solidFill>
+                  <a:schemeClr val="accent2">
+                    <a:lumMod val="60000"/>
+                    <a:lumOff val="40000"/>
+                  </a:schemeClr>
+                </a:solidFill>
+              </a:rPr>
+              <a:t>Microcontrollers</a:t>
+            </a:r>
           </a:p>
         </p:txBody>
       </p:sp>
     </p:spTree>
     <p:extLst>
       <p:ext uri="{BB962C8B-B14F-4D97-AF65-F5344CB8AC3E}">
-        <p14:creationId xmlns:p14="http://schemas.microsoft.com/office/powerpoint/2010/main" val="1307423825"/>
+        <p14:creationId xmlns:p14="http://schemas.microsoft.com/office/powerpoint/2010/main" val="222408637"/>
       </p:ext>
     </p:extLst>
   </p:cSld>
   <p:clrMapOvr>
     <a:masterClrMapping/>
   </p:clrMapOvr>
-  <mc:AlternateContent xmlns:mc="http://schemas.openxmlformats.org/markup-compatibility/2006">
-    <mc:Choice xmlns:p14="http://schemas.microsoft.com/office/powerpoint/2010/main" Requires="p14">
-      <p:transition spd="med" p14:dur="700">
-        <p:fade/>
-      </p:transition>
-    </mc:Choice>
-    <mc:Fallback>
-      <p:transition spd="med">
-        <p:fade/>
-      </p:transition>
-    </mc:Fallback>
-  </mc:AlternateContent>
 </p:sld>
 </file>
 
-<file path=ppt/slides/slide19.xml><?xml version="1.0" encoding="utf-8"?>
+<file path=ppt/slides/slide20.xml><?xml version="1.0" encoding="utf-8"?>
 <p:sld xmlns:a="http://schemas.openxmlformats.org/drawingml/2006/main" xmlns:r="http://schemas.openxmlformats.org/officeDocument/2006/relationships" xmlns:p="http://schemas.openxmlformats.org/presentationml/2006/main">
   <p:cSld>
     <p:spTree>
@@ -10301,7 +11195,7 @@
 </p:sld>
 </file>
 
-<file path=ppt/slides/slide2.xml><?xml version="1.0" encoding="utf-8"?>
+<file path=ppt/slides/slide21.xml><?xml version="1.0" encoding="utf-8"?>
 <p:sld xmlns:a="http://schemas.openxmlformats.org/drawingml/2006/main" xmlns:r="http://schemas.openxmlformats.org/officeDocument/2006/relationships" xmlns:p="http://schemas.openxmlformats.org/presentationml/2006/main">
   <p:cSld>
     <p:spTree>
@@ -10323,7 +11217,7 @@
           <p:cNvPr id="2" name="Title 1">
             <a:extLst>
               <a:ext uri="{FF2B5EF4-FFF2-40B4-BE49-F238E27FC236}">
-                <a16:creationId xmlns:a16="http://schemas.microsoft.com/office/drawing/2014/main" id="{F0DB7DC9-F6E2-F1D6-FAB2-13C163FD8388}"/>
+                <a16:creationId xmlns:a16="http://schemas.microsoft.com/office/drawing/2014/main" id="{189883CD-0B57-90FC-03B1-7A1EB1CCD3D3}"/>
               </a:ext>
             </a:extLst>
           </p:cNvPr>
@@ -10340,71 +11234,6 @@
           <a:lstStyle/>
           <a:p>
             <a:r>
-              <a:rPr lang="en-US" dirty="0">
-                <a:solidFill>
-                  <a:schemeClr val="accent2">
-                    <a:lumMod val="60000"/>
-                    <a:lumOff val="40000"/>
-                  </a:schemeClr>
-                </a:solidFill>
-              </a:rPr>
-              <a:t>Microcontrollers</a:t>
-            </a:r>
-          </a:p>
-        </p:txBody>
-      </p:sp>
-    </p:spTree>
-    <p:extLst>
-      <p:ext uri="{BB962C8B-B14F-4D97-AF65-F5344CB8AC3E}">
-        <p14:creationId xmlns:p14="http://schemas.microsoft.com/office/powerpoint/2010/main" val="222408637"/>
-      </p:ext>
-    </p:extLst>
-  </p:cSld>
-  <p:clrMapOvr>
-    <a:masterClrMapping/>
-  </p:clrMapOvr>
-</p:sld>
-</file>
-
-<file path=ppt/slides/slide20.xml><?xml version="1.0" encoding="utf-8"?>
-<p:sld xmlns:a="http://schemas.openxmlformats.org/drawingml/2006/main" xmlns:r="http://schemas.openxmlformats.org/officeDocument/2006/relationships" xmlns:p="http://schemas.openxmlformats.org/presentationml/2006/main">
-  <p:cSld>
-    <p:spTree>
-      <p:nvGrpSpPr>
-        <p:cNvPr id="1" name=""/>
-        <p:cNvGrpSpPr/>
-        <p:nvPr/>
-      </p:nvGrpSpPr>
-      <p:grpSpPr>
-        <a:xfrm>
-          <a:off x="0" y="0"/>
-          <a:ext cx="0" cy="0"/>
-          <a:chOff x="0" y="0"/>
-          <a:chExt cx="0" cy="0"/>
-        </a:xfrm>
-      </p:grpSpPr>
-      <p:sp>
-        <p:nvSpPr>
-          <p:cNvPr id="2" name="Title 1">
-            <a:extLst>
-              <a:ext uri="{FF2B5EF4-FFF2-40B4-BE49-F238E27FC236}">
-                <a16:creationId xmlns:a16="http://schemas.microsoft.com/office/drawing/2014/main" id="{189883CD-0B57-90FC-03B1-7A1EB1CCD3D3}"/>
-              </a:ext>
-            </a:extLst>
-          </p:cNvPr>
-          <p:cNvSpPr>
-            <a:spLocks noGrp="1"/>
-          </p:cNvSpPr>
-          <p:nvPr>
-            <p:ph type="title"/>
-          </p:nvPr>
-        </p:nvSpPr>
-        <p:spPr/>
-        <p:txBody>
-          <a:bodyPr/>
-          <a:lstStyle/>
-          <a:p>
-            <a:r>
               <a:rPr lang="en-US" dirty="0" err="1"/>
               <a:t>Blink.ino</a:t>
             </a:r>
@@ -10439,7 +11268,7 @@
             <a:fld id="{EB37DED6-D4C7-42EE-AB49-D2E39E64FDE4}" type="slidenum">
               <a:rPr lang="en-US" smtClean="0"/>
               <a:pPr/>
-              <a:t>20</a:t>
+              <a:t>21</a:t>
             </a:fld>
             <a:endParaRPr lang="en-US" dirty="0"/>
           </a:p>
@@ -10500,7 +11329,7 @@
 </p:sld>
 </file>
 
-<file path=ppt/slides/slide21.xml><?xml version="1.0" encoding="utf-8"?>
+<file path=ppt/slides/slide22.xml><?xml version="1.0" encoding="utf-8"?>
 <p:sld xmlns:a="http://schemas.openxmlformats.org/drawingml/2006/main" xmlns:r="http://schemas.openxmlformats.org/officeDocument/2006/relationships" xmlns:p="http://schemas.openxmlformats.org/presentationml/2006/main">
   <p:cSld>
     <p:spTree>
@@ -10655,7 +11484,7 @@
             <a:fld id="{EB37DED6-D4C7-42EE-AB49-D2E39E64FDE4}" type="slidenum">
               <a:rPr lang="en-US" smtClean="0"/>
               <a:pPr/>
-              <a:t>21</a:t>
+              <a:t>22</a:t>
             </a:fld>
             <a:endParaRPr lang="en-US" dirty="0"/>
           </a:p>
@@ -10686,7 +11515,7 @@
 </p:sld>
 </file>
 
-<file path=ppt/slides/slide22.xml><?xml version="1.0" encoding="utf-8"?>
+<file path=ppt/slides/slide23.xml><?xml version="1.0" encoding="utf-8"?>
 <p:sld xmlns:a="http://schemas.openxmlformats.org/drawingml/2006/main" xmlns:r="http://schemas.openxmlformats.org/officeDocument/2006/relationships" xmlns:p="http://schemas.openxmlformats.org/presentationml/2006/main">
   <p:cSld>
     <p:spTree>
@@ -10761,7 +11590,124 @@
           <a:bodyPr/>
           <a:lstStyle/>
           <a:p>
-            <a:endParaRPr lang="en-US"/>
+            <a:r>
+              <a:rPr lang="en-US" b="1" dirty="0"/>
+              <a:t>Setup:</a:t>
+            </a:r>
+          </a:p>
+          <a:p>
+            <a:r>
+              <a:rPr lang="en-US" dirty="0" err="1"/>
+              <a:t>pinMode</a:t>
+            </a:r>
+            <a:r>
+              <a:rPr lang="en-US" dirty="0"/>
+              <a:t>(</a:t>
+            </a:r>
+            <a:r>
+              <a:rPr lang="en-US" dirty="0" err="1"/>
+              <a:t>pin_number</a:t>
+            </a:r>
+            <a:r>
+              <a:rPr lang="en-US" dirty="0"/>
+              <a:t>, INPUT_PULLUP); </a:t>
+            </a:r>
+            <a:r>
+              <a:rPr lang="en-US" dirty="0">
+                <a:sym typeface="Wingdings" panose="05000000000000000000" pitchFamily="2" charset="2"/>
+              </a:rPr>
+              <a:t> read HIGH by default, LOW if change.</a:t>
+            </a:r>
+          </a:p>
+          <a:p>
+            <a:r>
+              <a:rPr lang="en-US" dirty="0" err="1">
+                <a:sym typeface="Wingdings" panose="05000000000000000000" pitchFamily="2" charset="2"/>
+              </a:rPr>
+              <a:t>pinMode</a:t>
+            </a:r>
+            <a:r>
+              <a:rPr lang="en-US" dirty="0">
+                <a:sym typeface="Wingdings" panose="05000000000000000000" pitchFamily="2" charset="2"/>
+              </a:rPr>
+              <a:t>(</a:t>
+            </a:r>
+            <a:r>
+              <a:rPr lang="en-US" dirty="0" err="1">
+                <a:sym typeface="Wingdings" panose="05000000000000000000" pitchFamily="2" charset="2"/>
+              </a:rPr>
+              <a:t>pin_number</a:t>
+            </a:r>
+            <a:r>
+              <a:rPr lang="en-US" dirty="0">
+                <a:sym typeface="Wingdings" panose="05000000000000000000" pitchFamily="2" charset="2"/>
+              </a:rPr>
+              <a:t>, INPUT);  floating (high impedance) by default</a:t>
+            </a:r>
+          </a:p>
+          <a:p>
+            <a:r>
+              <a:rPr lang="en-US" b="1" dirty="0"/>
+              <a:t>Reading Inputs</a:t>
+            </a:r>
+          </a:p>
+          <a:p>
+            <a:r>
+              <a:rPr lang="en-US" dirty="0"/>
+              <a:t>Value = </a:t>
+            </a:r>
+            <a:r>
+              <a:rPr lang="en-US" dirty="0" err="1"/>
+              <a:t>digitalRead</a:t>
+            </a:r>
+            <a:r>
+              <a:rPr lang="en-US" dirty="0"/>
+              <a:t>(</a:t>
+            </a:r>
+            <a:r>
+              <a:rPr lang="en-US" dirty="0" err="1"/>
+              <a:t>pin_number</a:t>
+            </a:r>
+            <a:r>
+              <a:rPr lang="en-US" dirty="0"/>
+              <a:t>); </a:t>
+            </a:r>
+            <a:r>
+              <a:rPr lang="en-US" dirty="0">
+                <a:sym typeface="Wingdings" panose="05000000000000000000" pitchFamily="2" charset="2"/>
+              </a:rPr>
+              <a:t> output an </a:t>
+            </a:r>
+            <a:r>
+              <a:rPr lang="en-US" i="1" dirty="0">
+                <a:sym typeface="Wingdings" panose="05000000000000000000" pitchFamily="2" charset="2"/>
+              </a:rPr>
+              <a:t>int</a:t>
+            </a:r>
+            <a:r>
+              <a:rPr lang="en-US" dirty="0">
+                <a:sym typeface="Wingdings" panose="05000000000000000000" pitchFamily="2" charset="2"/>
+              </a:rPr>
+              <a:t> type, 0 or 1</a:t>
+            </a:r>
+          </a:p>
+          <a:p>
+            <a:pPr lvl="1"/>
+            <a:r>
+              <a:rPr lang="en-US" dirty="0">
+                <a:sym typeface="Wingdings" panose="05000000000000000000" pitchFamily="2" charset="2"/>
+              </a:rPr>
+              <a:t>Arduino has names for this: LOW and HIGH. LOW == 0, HIGH == 1.</a:t>
+            </a:r>
+          </a:p>
+          <a:p>
+            <a:pPr lvl="1"/>
+            <a:r>
+              <a:rPr lang="en-US" dirty="0">
+                <a:sym typeface="Wingdings" panose="05000000000000000000" pitchFamily="2" charset="2"/>
+              </a:rPr>
+              <a:t>Use this value to gauge if something has happened with the input</a:t>
+            </a:r>
           </a:p>
         </p:txBody>
       </p:sp>
@@ -10789,7 +11735,7 @@
             <a:fld id="{EB37DED6-D4C7-42EE-AB49-D2E39E64FDE4}" type="slidenum">
               <a:rPr lang="en-US" smtClean="0"/>
               <a:pPr/>
-              <a:t>22</a:t>
+              <a:t>23</a:t>
             </a:fld>
             <a:endParaRPr lang="en-US" dirty="0"/>
           </a:p>
@@ -10805,13 +11751,13 @@
   <p:clrMapOvr>
     <a:masterClrMapping/>
   </p:clrMapOvr>
-  <mc:AlternateContent xmlns:mc="http://schemas.openxmlformats.org/markup-compatibility/2006">
-    <mc:Choice xmlns:p14="http://schemas.microsoft.com/office/powerpoint/2010/main" Requires="p14">
+  <mc:AlternateContent xmlns:mc="http://schemas.openxmlformats.org/markup-compatibility/2006" xmlns:p14="http://schemas.microsoft.com/office/powerpoint/2010/main">
+    <mc:Choice Requires="p14">
       <p:transition spd="med" p14:dur="700">
         <p:fade/>
       </p:transition>
     </mc:Choice>
-    <mc:Fallback>
+    <mc:Fallback xmlns="">
       <p:transition spd="med">
         <p:fade/>
       </p:transition>
@@ -10820,7 +11766,7 @@
 </p:sld>
 </file>
 
-<file path=ppt/slides/slide23.xml><?xml version="1.0" encoding="utf-8"?>
+<file path=ppt/slides/slide24.xml><?xml version="1.0" encoding="utf-8"?>
 <p:sld xmlns:a="http://schemas.openxmlformats.org/drawingml/2006/main" xmlns:r="http://schemas.openxmlformats.org/officeDocument/2006/relationships" xmlns:p="http://schemas.openxmlformats.org/presentationml/2006/main">
   <p:cSld>
     <p:spTree>
@@ -10895,7 +11841,87 @@
           <a:bodyPr/>
           <a:lstStyle/>
           <a:p>
-            <a:endParaRPr lang="en-US"/>
+            <a:r>
+              <a:rPr lang="en-US" b="1" dirty="0"/>
+              <a:t>Setup:</a:t>
+            </a:r>
+          </a:p>
+          <a:p>
+            <a:pPr lvl="1"/>
+            <a:r>
+              <a:rPr lang="en-US" dirty="0" err="1"/>
+              <a:t>pinMode</a:t>
+            </a:r>
+            <a:r>
+              <a:rPr lang="en-US" dirty="0"/>
+              <a:t>(</a:t>
+            </a:r>
+            <a:r>
+              <a:rPr lang="en-US" dirty="0" err="1"/>
+              <a:t>pin_number</a:t>
+            </a:r>
+            <a:r>
+              <a:rPr lang="en-US" dirty="0"/>
+              <a:t>, OUTPUT)</a:t>
+            </a:r>
+          </a:p>
+          <a:p>
+            <a:r>
+              <a:rPr lang="en-US" b="1" dirty="0"/>
+              <a:t>Write to output:</a:t>
+            </a:r>
+          </a:p>
+          <a:p>
+            <a:pPr lvl="1"/>
+            <a:r>
+              <a:rPr lang="en-US" dirty="0" err="1"/>
+              <a:t>digitalWrite</a:t>
+            </a:r>
+            <a:r>
+              <a:rPr lang="en-US" dirty="0"/>
+              <a:t>(</a:t>
+            </a:r>
+            <a:r>
+              <a:rPr lang="en-US" dirty="0" err="1"/>
+              <a:t>pinNumber</a:t>
+            </a:r>
+            <a:r>
+              <a:rPr lang="en-US" dirty="0"/>
+              <a:t>, HIGH); </a:t>
+            </a:r>
+            <a:r>
+              <a:rPr lang="en-US" dirty="0">
+                <a:sym typeface="Wingdings" panose="05000000000000000000" pitchFamily="2" charset="2"/>
+              </a:rPr>
+              <a:t> no return value</a:t>
+            </a:r>
+            <a:endParaRPr lang="en-US" dirty="0"/>
+          </a:p>
+          <a:p>
+            <a:pPr lvl="1"/>
+            <a:r>
+              <a:rPr lang="en-US" dirty="0" err="1"/>
+              <a:t>digitalWrite</a:t>
+            </a:r>
+            <a:r>
+              <a:rPr lang="en-US" dirty="0"/>
+              <a:t>(</a:t>
+            </a:r>
+            <a:r>
+              <a:rPr lang="en-US" dirty="0" err="1"/>
+              <a:t>pinNumber</a:t>
+            </a:r>
+            <a:r>
+              <a:rPr lang="en-US" dirty="0"/>
+              <a:t>, LOW); </a:t>
+            </a:r>
+            <a:r>
+              <a:rPr lang="en-US" dirty="0">
+                <a:sym typeface="Wingdings" panose="05000000000000000000" pitchFamily="2" charset="2"/>
+              </a:rPr>
+              <a:t> no return value</a:t>
+            </a:r>
+            <a:endParaRPr lang="en-US" dirty="0"/>
           </a:p>
         </p:txBody>
       </p:sp>
@@ -10923,7 +11949,7 @@
             <a:fld id="{EB37DED6-D4C7-42EE-AB49-D2E39E64FDE4}" type="slidenum">
               <a:rPr lang="en-US" smtClean="0"/>
               <a:pPr/>
-              <a:t>23</a:t>
+              <a:t>24</a:t>
             </a:fld>
             <a:endParaRPr lang="en-US" dirty="0"/>
           </a:p>
@@ -10939,13 +11965,13 @@
   <p:clrMapOvr>
     <a:masterClrMapping/>
   </p:clrMapOvr>
-  <mc:AlternateContent xmlns:mc="http://schemas.openxmlformats.org/markup-compatibility/2006">
-    <mc:Choice xmlns:p14="http://schemas.microsoft.com/office/powerpoint/2010/main" Requires="p14">
+  <mc:AlternateContent xmlns:mc="http://schemas.openxmlformats.org/markup-compatibility/2006" xmlns:p14="http://schemas.microsoft.com/office/powerpoint/2010/main">
+    <mc:Choice Requires="p14">
       <p:transition spd="med" p14:dur="700">
         <p:fade/>
       </p:transition>
     </mc:Choice>
-    <mc:Fallback>
+    <mc:Fallback xmlns="">
       <p:transition spd="med">
         <p:fade/>
       </p:transition>
@@ -10954,7 +11980,7 @@
 </p:sld>
 </file>
 
-<file path=ppt/slides/slide24.xml><?xml version="1.0" encoding="utf-8"?>
+<file path=ppt/slides/slide25.xml><?xml version="1.0" encoding="utf-8"?>
 <p:sld xmlns:a="http://schemas.openxmlformats.org/drawingml/2006/main" xmlns:r="http://schemas.openxmlformats.org/officeDocument/2006/relationships" xmlns:p="http://schemas.openxmlformats.org/presentationml/2006/main">
   <p:cSld>
     <p:spTree>
@@ -11025,7 +12051,7 @@
 </p:sld>
 </file>
 
-<file path=ppt/slides/slide25.xml><?xml version="1.0" encoding="utf-8"?>
+<file path=ppt/slides/slide26.xml><?xml version="1.0" encoding="utf-8"?>
 <p:sld xmlns:a="http://schemas.openxmlformats.org/drawingml/2006/main" xmlns:r="http://schemas.openxmlformats.org/officeDocument/2006/relationships" xmlns:p="http://schemas.openxmlformats.org/presentationml/2006/main">
   <p:cSld>
     <p:spTree>
@@ -11074,7 +12100,7 @@
             <a:pPr algn="ctr"/>
             <a:r>
               <a:rPr lang="en-US" sz="4400" dirty="0"/>
-              <a:t>Outputs</a:t>
+              <a:t>Button Input Walkthrough</a:t>
             </a:r>
           </a:p>
         </p:txBody>
@@ -11100,7 +12126,42 @@
           <a:bodyPr/>
           <a:lstStyle/>
           <a:p>
-            <a:endParaRPr lang="en-US"/>
+            <a:r>
+              <a:rPr lang="en-US" dirty="0"/>
+              <a:t>Connect one side of button to GND, other side to a GPIO on microcontroller</a:t>
+            </a:r>
+          </a:p>
+          <a:p>
+            <a:r>
+              <a:rPr lang="en-US" dirty="0"/>
+              <a:t>Set the GPIO as an INPUT_PULLUP so it reads HIGH by default</a:t>
+            </a:r>
+          </a:p>
+          <a:p>
+            <a:r>
+              <a:rPr lang="en-US" dirty="0"/>
+              <a:t>If </a:t>
+            </a:r>
+            <a:r>
+              <a:rPr lang="en-US" dirty="0" err="1"/>
+              <a:t>digitalRead</a:t>
+            </a:r>
+            <a:r>
+              <a:rPr lang="en-US" dirty="0"/>
+              <a:t>(pin) is LOW then we know the pin has been connected to ground through the button, meaning the button has been pressed. </a:t>
+            </a:r>
+          </a:p>
+          <a:p>
+            <a:r>
+              <a:rPr lang="en-US" dirty="0"/>
+              <a:t>If we want to continuously check this condition we put it in the loop function</a:t>
+            </a:r>
+          </a:p>
+          <a:p>
+            <a:r>
+              <a:rPr lang="en-US" dirty="0"/>
+              <a:t>Can output to serial monitor to verify</a:t>
+            </a:r>
           </a:p>
         </p:txBody>
       </p:sp>
@@ -11128,7 +12189,7 @@
             <a:fld id="{EB37DED6-D4C7-42EE-AB49-D2E39E64FDE4}" type="slidenum">
               <a:rPr lang="en-US" smtClean="0"/>
               <a:pPr/>
-              <a:t>25</a:t>
+              <a:t>26</a:t>
             </a:fld>
             <a:endParaRPr lang="en-US" dirty="0"/>
           </a:p>
@@ -11138,6 +12199,145 @@
     <p:extLst>
       <p:ext uri="{BB962C8B-B14F-4D97-AF65-F5344CB8AC3E}">
         <p14:creationId xmlns:p14="http://schemas.microsoft.com/office/powerpoint/2010/main" val="3799692162"/>
+      </p:ext>
+    </p:extLst>
+  </p:cSld>
+  <p:clrMapOvr>
+    <a:masterClrMapping/>
+  </p:clrMapOvr>
+  <mc:AlternateContent xmlns:mc="http://schemas.openxmlformats.org/markup-compatibility/2006" xmlns:p14="http://schemas.microsoft.com/office/powerpoint/2010/main">
+    <mc:Choice Requires="p14">
+      <p:transition spd="med" p14:dur="700">
+        <p:fade/>
+      </p:transition>
+    </mc:Choice>
+    <mc:Fallback xmlns="">
+      <p:transition spd="med">
+        <p:fade/>
+      </p:transition>
+    </mc:Fallback>
+  </mc:AlternateContent>
+</p:sld>
+</file>
+
+<file path=ppt/slides/slide27.xml><?xml version="1.0" encoding="utf-8"?>
+<p:sld xmlns:a="http://schemas.openxmlformats.org/drawingml/2006/main" xmlns:r="http://schemas.openxmlformats.org/officeDocument/2006/relationships" xmlns:p="http://schemas.openxmlformats.org/presentationml/2006/main">
+  <p:cSld>
+    <p:spTree>
+      <p:nvGrpSpPr>
+        <p:cNvPr id="1" name="">
+          <a:extLst>
+            <a:ext uri="{FF2B5EF4-FFF2-40B4-BE49-F238E27FC236}">
+              <a16:creationId xmlns:a16="http://schemas.microsoft.com/office/drawing/2014/main" id="{4D5FB425-664D-C927-BE8A-6EF5B0E9B16B}"/>
+            </a:ext>
+          </a:extLst>
+        </p:cNvPr>
+        <p:cNvGrpSpPr/>
+        <p:nvPr/>
+      </p:nvGrpSpPr>
+      <p:grpSpPr>
+        <a:xfrm>
+          <a:off x="0" y="0"/>
+          <a:ext cx="0" cy="0"/>
+          <a:chOff x="0" y="0"/>
+          <a:chExt cx="0" cy="0"/>
+        </a:xfrm>
+      </p:grpSpPr>
+      <p:sp>
+        <p:nvSpPr>
+          <p:cNvPr id="2" name="Title 1">
+            <a:extLst>
+              <a:ext uri="{FF2B5EF4-FFF2-40B4-BE49-F238E27FC236}">
+                <a16:creationId xmlns:a16="http://schemas.microsoft.com/office/drawing/2014/main" id="{3AD7ED9A-8031-0795-17E0-B6AB288CED31}"/>
+              </a:ext>
+            </a:extLst>
+          </p:cNvPr>
+          <p:cNvSpPr>
+            <a:spLocks noGrp="1"/>
+          </p:cNvSpPr>
+          <p:nvPr>
+            <p:ph type="title"/>
+          </p:nvPr>
+        </p:nvSpPr>
+        <p:spPr/>
+        <p:txBody>
+          <a:bodyPr>
+            <a:normAutofit/>
+          </a:bodyPr>
+          <a:lstStyle/>
+          <a:p>
+            <a:pPr algn="ctr"/>
+            <a:r>
+              <a:rPr lang="en-US" sz="4400" dirty="0"/>
+              <a:t>Button Code Walkthrough</a:t>
+            </a:r>
+          </a:p>
+        </p:txBody>
+      </p:sp>
+      <p:sp>
+        <p:nvSpPr>
+          <p:cNvPr id="4" name="Slide Number Placeholder 3">
+            <a:extLst>
+              <a:ext uri="{FF2B5EF4-FFF2-40B4-BE49-F238E27FC236}">
+                <a16:creationId xmlns:a16="http://schemas.microsoft.com/office/drawing/2014/main" id="{ED4C82C9-FF69-E15C-5A9F-597E54BF35A0}"/>
+              </a:ext>
+            </a:extLst>
+          </p:cNvPr>
+          <p:cNvSpPr>
+            <a:spLocks noGrp="1"/>
+          </p:cNvSpPr>
+          <p:nvPr>
+            <p:ph type="sldNum" sz="quarter" idx="12"/>
+          </p:nvPr>
+        </p:nvSpPr>
+        <p:spPr/>
+        <p:txBody>
+          <a:bodyPr/>
+          <a:lstStyle/>
+          <a:p>
+            <a:fld id="{EB37DED6-D4C7-42EE-AB49-D2E39E64FDE4}" type="slidenum">
+              <a:rPr lang="en-US" smtClean="0"/>
+              <a:pPr/>
+              <a:t>27</a:t>
+            </a:fld>
+            <a:endParaRPr lang="en-US" dirty="0"/>
+          </a:p>
+        </p:txBody>
+      </p:sp>
+      <p:pic>
+        <p:nvPicPr>
+          <p:cNvPr id="6" name="Picture 5">
+            <a:extLst>
+              <a:ext uri="{FF2B5EF4-FFF2-40B4-BE49-F238E27FC236}">
+                <a16:creationId xmlns:a16="http://schemas.microsoft.com/office/drawing/2014/main" id="{8E1BEEA6-DF04-21E7-B29B-04D1CC055932}"/>
+              </a:ext>
+            </a:extLst>
+          </p:cNvPr>
+          <p:cNvPicPr>
+            <a:picLocks noChangeAspect="1"/>
+          </p:cNvPicPr>
+          <p:nvPr/>
+        </p:nvPicPr>
+        <p:blipFill>
+          <a:blip r:embed="rId2"/>
+          <a:stretch>
+            <a:fillRect/>
+          </a:stretch>
+        </p:blipFill>
+        <p:spPr>
+          <a:xfrm>
+            <a:off x="2647867" y="1618488"/>
+            <a:ext cx="6893090" cy="4876800"/>
+          </a:xfrm>
+          <a:prstGeom prst="rect">
+            <a:avLst/>
+          </a:prstGeom>
+        </p:spPr>
+      </p:pic>
+    </p:spTree>
+    <p:extLst>
+      <p:ext uri="{BB962C8B-B14F-4D97-AF65-F5344CB8AC3E}">
+        <p14:creationId xmlns:p14="http://schemas.microsoft.com/office/powerpoint/2010/main" val="4014972151"/>
       </p:ext>
     </p:extLst>
   </p:cSld>
@@ -11159,7 +12359,7 @@
 </p:sld>
 </file>
 
-<file path=ppt/slides/slide26.xml><?xml version="1.0" encoding="utf-8"?>
+<file path=ppt/slides/slide28.xml><?xml version="1.0" encoding="utf-8"?>
 <p:sld xmlns:a="http://schemas.openxmlformats.org/drawingml/2006/main" xmlns:r="http://schemas.openxmlformats.org/officeDocument/2006/relationships" xmlns:p="http://schemas.openxmlformats.org/presentationml/2006/main">
   <p:cSld>
     <p:spTree>
@@ -11230,7 +12430,7 @@
 </p:sld>
 </file>
 
-<file path=ppt/slides/slide27.xml><?xml version="1.0" encoding="utf-8"?>
+<file path=ppt/slides/slide29.xml><?xml version="1.0" encoding="utf-8"?>
 <p:sld xmlns:a="http://schemas.openxmlformats.org/drawingml/2006/main" xmlns:r="http://schemas.openxmlformats.org/officeDocument/2006/relationships" xmlns:p="http://schemas.openxmlformats.org/presentationml/2006/main">
   <p:cSld>
     <p:spTree>
@@ -11279,7 +12479,7 @@
             <a:pPr algn="ctr"/>
             <a:r>
               <a:rPr lang="en-US" sz="4400" dirty="0"/>
-              <a:t>Outputs</a:t>
+              <a:t>LED Output</a:t>
             </a:r>
           </a:p>
         </p:txBody>
@@ -11305,7 +12505,87 @@
           <a:bodyPr/>
           <a:lstStyle/>
           <a:p>
-            <a:endParaRPr lang="en-US"/>
+            <a:r>
+              <a:rPr lang="en-US" dirty="0"/>
+              <a:t>Connect LED and current limiting resistor to microcontroller GPIO</a:t>
+            </a:r>
+          </a:p>
+          <a:p>
+            <a:pPr lvl="1"/>
+            <a:r>
+              <a:rPr lang="en-US" dirty="0"/>
+              <a:t>MCU GPIO </a:t>
+            </a:r>
+            <a:r>
+              <a:rPr lang="en-US" dirty="0">
+                <a:sym typeface="Wingdings" panose="05000000000000000000" pitchFamily="2" charset="2"/>
+              </a:rPr>
+              <a:t> Resistor  anode (+)  cathode (-)  GND</a:t>
+            </a:r>
+          </a:p>
+          <a:p>
+            <a:r>
+              <a:rPr lang="en-US" dirty="0">
+                <a:sym typeface="Wingdings" panose="05000000000000000000" pitchFamily="2" charset="2"/>
+              </a:rPr>
+              <a:t>Set GPIO as an OUTPUT with </a:t>
+            </a:r>
+            <a:r>
+              <a:rPr lang="en-US" dirty="0" err="1">
+                <a:sym typeface="Wingdings" panose="05000000000000000000" pitchFamily="2" charset="2"/>
+              </a:rPr>
+              <a:t>pinMode</a:t>
+            </a:r>
+            <a:r>
+              <a:rPr lang="en-US" dirty="0">
+                <a:sym typeface="Wingdings" panose="05000000000000000000" pitchFamily="2" charset="2"/>
+              </a:rPr>
+              <a:t>(LED_PIN, OUTPUT);</a:t>
+            </a:r>
+          </a:p>
+          <a:p>
+            <a:r>
+              <a:rPr lang="en-US" dirty="0">
+                <a:sym typeface="Wingdings" panose="05000000000000000000" pitchFamily="2" charset="2"/>
+              </a:rPr>
+              <a:t>Write HIGH to it  delay  write LOW  delay</a:t>
+            </a:r>
+          </a:p>
+          <a:p>
+            <a:pPr lvl="1"/>
+            <a:r>
+              <a:rPr lang="en-US" dirty="0" err="1">
+                <a:sym typeface="Wingdings" panose="05000000000000000000" pitchFamily="2" charset="2"/>
+              </a:rPr>
+              <a:t>digitalRead</a:t>
+            </a:r>
+            <a:r>
+              <a:rPr lang="en-US" dirty="0">
+                <a:sym typeface="Wingdings" panose="05000000000000000000" pitchFamily="2" charset="2"/>
+              </a:rPr>
+              <a:t>(LED_PIN, HIGH), </a:t>
+            </a:r>
+            <a:r>
+              <a:rPr lang="en-US" dirty="0" err="1">
+                <a:sym typeface="Wingdings" panose="05000000000000000000" pitchFamily="2" charset="2"/>
+              </a:rPr>
+              <a:t>digitalRead</a:t>
+            </a:r>
+            <a:r>
+              <a:rPr lang="en-US" dirty="0">
+                <a:sym typeface="Wingdings" panose="05000000000000000000" pitchFamily="2" charset="2"/>
+              </a:rPr>
+              <a:t>(LED_PIN, LOW)</a:t>
+            </a:r>
+          </a:p>
+          <a:p>
+            <a:r>
+              <a:rPr lang="en-US" dirty="0">
+                <a:sym typeface="Wingdings" panose="05000000000000000000" pitchFamily="2" charset="2"/>
+              </a:rPr>
+              <a:t>Same exact structure as the example Blink file! Just with an external GPIO.</a:t>
+            </a:r>
+            <a:endParaRPr lang="en-US" dirty="0"/>
           </a:p>
         </p:txBody>
       </p:sp>
@@ -11333,7 +12613,7 @@
             <a:fld id="{EB37DED6-D4C7-42EE-AB49-D2E39E64FDE4}" type="slidenum">
               <a:rPr lang="en-US" smtClean="0"/>
               <a:pPr/>
-              <a:t>27</a:t>
+              <a:t>29</a:t>
             </a:fld>
             <a:endParaRPr lang="en-US" dirty="0"/>
           </a:p>
@@ -11349,13 +12629,13 @@
   <p:clrMapOvr>
     <a:masterClrMapping/>
   </p:clrMapOvr>
-  <mc:AlternateContent xmlns:mc="http://schemas.openxmlformats.org/markup-compatibility/2006">
-    <mc:Choice xmlns:p14="http://schemas.microsoft.com/office/powerpoint/2010/main" Requires="p14">
+  <mc:AlternateContent xmlns:mc="http://schemas.openxmlformats.org/markup-compatibility/2006" xmlns:p14="http://schemas.microsoft.com/office/powerpoint/2010/main">
+    <mc:Choice Requires="p14">
       <p:transition spd="med" p14:dur="700">
         <p:fade/>
       </p:transition>
     </mc:Choice>
-    <mc:Fallback>
+    <mc:Fallback xmlns="">
       <p:transition spd="med">
         <p:fade/>
       </p:transition>
@@ -11589,6 +12869,570 @@
       </p:transition>
     </mc:Choice>
     <mc:Fallback xmlns="">
+      <p:transition spd="med">
+        <p:fade/>
+      </p:transition>
+    </mc:Fallback>
+  </mc:AlternateContent>
+</p:sld>
+</file>
+
+<file path=ppt/slides/slide30.xml><?xml version="1.0" encoding="utf-8"?>
+<p:sld xmlns:a="http://schemas.openxmlformats.org/drawingml/2006/main" xmlns:r="http://schemas.openxmlformats.org/officeDocument/2006/relationships" xmlns:p="http://schemas.openxmlformats.org/presentationml/2006/main">
+  <p:cSld>
+    <p:spTree>
+      <p:nvGrpSpPr>
+        <p:cNvPr id="1" name="">
+          <a:extLst>
+            <a:ext uri="{FF2B5EF4-FFF2-40B4-BE49-F238E27FC236}">
+              <a16:creationId xmlns:a16="http://schemas.microsoft.com/office/drawing/2014/main" id="{81F303DF-AAF7-9233-75E8-ABD88E750313}"/>
+            </a:ext>
+          </a:extLst>
+        </p:cNvPr>
+        <p:cNvGrpSpPr/>
+        <p:nvPr/>
+      </p:nvGrpSpPr>
+      <p:grpSpPr>
+        <a:xfrm>
+          <a:off x="0" y="0"/>
+          <a:ext cx="0" cy="0"/>
+          <a:chOff x="0" y="0"/>
+          <a:chExt cx="0" cy="0"/>
+        </a:xfrm>
+      </p:grpSpPr>
+      <p:sp>
+        <p:nvSpPr>
+          <p:cNvPr id="2" name="Title 1">
+            <a:extLst>
+              <a:ext uri="{FF2B5EF4-FFF2-40B4-BE49-F238E27FC236}">
+                <a16:creationId xmlns:a16="http://schemas.microsoft.com/office/drawing/2014/main" id="{168E3C15-7A7A-812D-B341-C866E2A1EB98}"/>
+              </a:ext>
+            </a:extLst>
+          </p:cNvPr>
+          <p:cNvSpPr>
+            <a:spLocks noGrp="1"/>
+          </p:cNvSpPr>
+          <p:nvPr>
+            <p:ph type="title"/>
+          </p:nvPr>
+        </p:nvSpPr>
+        <p:spPr/>
+        <p:txBody>
+          <a:bodyPr>
+            <a:normAutofit/>
+          </a:bodyPr>
+          <a:lstStyle/>
+          <a:p>
+            <a:pPr algn="ctr"/>
+            <a:r>
+              <a:rPr lang="en-US" sz="4400" dirty="0"/>
+              <a:t>LED Code Walkthrough</a:t>
+            </a:r>
+          </a:p>
+        </p:txBody>
+      </p:sp>
+      <p:sp>
+        <p:nvSpPr>
+          <p:cNvPr id="4" name="Slide Number Placeholder 3">
+            <a:extLst>
+              <a:ext uri="{FF2B5EF4-FFF2-40B4-BE49-F238E27FC236}">
+                <a16:creationId xmlns:a16="http://schemas.microsoft.com/office/drawing/2014/main" id="{3E6B4F95-8E69-1463-B07F-EDCF4D023D8F}"/>
+              </a:ext>
+            </a:extLst>
+          </p:cNvPr>
+          <p:cNvSpPr>
+            <a:spLocks noGrp="1"/>
+          </p:cNvSpPr>
+          <p:nvPr>
+            <p:ph type="sldNum" sz="quarter" idx="12"/>
+          </p:nvPr>
+        </p:nvSpPr>
+        <p:spPr/>
+        <p:txBody>
+          <a:bodyPr/>
+          <a:lstStyle/>
+          <a:p>
+            <a:fld id="{EB37DED6-D4C7-42EE-AB49-D2E39E64FDE4}" type="slidenum">
+              <a:rPr lang="en-US" smtClean="0"/>
+              <a:pPr/>
+              <a:t>30</a:t>
+            </a:fld>
+            <a:endParaRPr lang="en-US" dirty="0"/>
+          </a:p>
+        </p:txBody>
+      </p:sp>
+      <p:pic>
+        <p:nvPicPr>
+          <p:cNvPr id="10" name="Picture 9">
+            <a:extLst>
+              <a:ext uri="{FF2B5EF4-FFF2-40B4-BE49-F238E27FC236}">
+                <a16:creationId xmlns:a16="http://schemas.microsoft.com/office/drawing/2014/main" id="{48DA8DA8-05AF-ACBD-D353-C6CC40F8D40A}"/>
+              </a:ext>
+            </a:extLst>
+          </p:cNvPr>
+          <p:cNvPicPr>
+            <a:picLocks noChangeAspect="1"/>
+          </p:cNvPicPr>
+          <p:nvPr/>
+        </p:nvPicPr>
+        <p:blipFill>
+          <a:blip r:embed="rId2"/>
+          <a:stretch>
+            <a:fillRect/>
+          </a:stretch>
+        </p:blipFill>
+        <p:spPr>
+          <a:xfrm>
+            <a:off x="1879908" y="1600200"/>
+            <a:ext cx="8429007" cy="4981659"/>
+          </a:xfrm>
+          <a:prstGeom prst="rect">
+            <a:avLst/>
+          </a:prstGeom>
+        </p:spPr>
+      </p:pic>
+    </p:spTree>
+    <p:extLst>
+      <p:ext uri="{BB962C8B-B14F-4D97-AF65-F5344CB8AC3E}">
+        <p14:creationId xmlns:p14="http://schemas.microsoft.com/office/powerpoint/2010/main" val="3218567944"/>
+      </p:ext>
+    </p:extLst>
+  </p:cSld>
+  <p:clrMapOvr>
+    <a:masterClrMapping/>
+  </p:clrMapOvr>
+  <mc:AlternateContent xmlns:mc="http://schemas.openxmlformats.org/markup-compatibility/2006">
+    <mc:Choice xmlns:p14="http://schemas.microsoft.com/office/powerpoint/2010/main" Requires="p14">
+      <p:transition spd="med" p14:dur="700">
+        <p:fade/>
+      </p:transition>
+    </mc:Choice>
+    <mc:Fallback>
+      <p:transition spd="med">
+        <p:fade/>
+      </p:transition>
+    </mc:Fallback>
+  </mc:AlternateContent>
+</p:sld>
+</file>
+
+<file path=ppt/slides/slide31.xml><?xml version="1.0" encoding="utf-8"?>
+<p:sld xmlns:a="http://schemas.openxmlformats.org/drawingml/2006/main" xmlns:r="http://schemas.openxmlformats.org/officeDocument/2006/relationships" xmlns:p="http://schemas.openxmlformats.org/presentationml/2006/main">
+  <p:cSld>
+    <p:spTree>
+      <p:nvGrpSpPr>
+        <p:cNvPr id="1" name="">
+          <a:extLst>
+            <a:ext uri="{FF2B5EF4-FFF2-40B4-BE49-F238E27FC236}">
+              <a16:creationId xmlns:a16="http://schemas.microsoft.com/office/drawing/2014/main" id="{93210D25-45B9-6904-E9D9-E8964EEABE77}"/>
+            </a:ext>
+          </a:extLst>
+        </p:cNvPr>
+        <p:cNvGrpSpPr/>
+        <p:nvPr/>
+      </p:nvGrpSpPr>
+      <p:grpSpPr>
+        <a:xfrm>
+          <a:off x="0" y="0"/>
+          <a:ext cx="0" cy="0"/>
+          <a:chOff x="0" y="0"/>
+          <a:chExt cx="0" cy="0"/>
+        </a:xfrm>
+      </p:grpSpPr>
+      <p:sp>
+        <p:nvSpPr>
+          <p:cNvPr id="2" name="Title 1">
+            <a:extLst>
+              <a:ext uri="{FF2B5EF4-FFF2-40B4-BE49-F238E27FC236}">
+                <a16:creationId xmlns:a16="http://schemas.microsoft.com/office/drawing/2014/main" id="{9F81DE79-C322-EB02-C020-15FBC4EFF8F3}"/>
+              </a:ext>
+            </a:extLst>
+          </p:cNvPr>
+          <p:cNvSpPr>
+            <a:spLocks noGrp="1"/>
+          </p:cNvSpPr>
+          <p:nvPr>
+            <p:ph type="title"/>
+          </p:nvPr>
+        </p:nvSpPr>
+        <p:spPr/>
+        <p:txBody>
+          <a:bodyPr/>
+          <a:lstStyle/>
+          <a:p>
+            <a:r>
+              <a:rPr lang="en-US" dirty="0">
+                <a:solidFill>
+                  <a:schemeClr val="accent2">
+                    <a:lumMod val="60000"/>
+                    <a:lumOff val="40000"/>
+                  </a:schemeClr>
+                </a:solidFill>
+              </a:rPr>
+              <a:t>Example: Buzzer Output</a:t>
+            </a:r>
+          </a:p>
+        </p:txBody>
+      </p:sp>
+    </p:spTree>
+    <p:extLst>
+      <p:ext uri="{BB962C8B-B14F-4D97-AF65-F5344CB8AC3E}">
+        <p14:creationId xmlns:p14="http://schemas.microsoft.com/office/powerpoint/2010/main" val="605230303"/>
+      </p:ext>
+    </p:extLst>
+  </p:cSld>
+  <p:clrMapOvr>
+    <a:masterClrMapping/>
+  </p:clrMapOvr>
+</p:sld>
+</file>
+
+<file path=ppt/slides/slide32.xml><?xml version="1.0" encoding="utf-8"?>
+<p:sld xmlns:a="http://schemas.openxmlformats.org/drawingml/2006/main" xmlns:r="http://schemas.openxmlformats.org/officeDocument/2006/relationships" xmlns:p="http://schemas.openxmlformats.org/presentationml/2006/main">
+  <p:cSld>
+    <p:spTree>
+      <p:nvGrpSpPr>
+        <p:cNvPr id="1" name="">
+          <a:extLst>
+            <a:ext uri="{FF2B5EF4-FFF2-40B4-BE49-F238E27FC236}">
+              <a16:creationId xmlns:a16="http://schemas.microsoft.com/office/drawing/2014/main" id="{D2CE6C80-D490-284D-8DB2-A45C95A801E0}"/>
+            </a:ext>
+          </a:extLst>
+        </p:cNvPr>
+        <p:cNvGrpSpPr/>
+        <p:nvPr/>
+      </p:nvGrpSpPr>
+      <p:grpSpPr>
+        <a:xfrm>
+          <a:off x="0" y="0"/>
+          <a:ext cx="0" cy="0"/>
+          <a:chOff x="0" y="0"/>
+          <a:chExt cx="0" cy="0"/>
+        </a:xfrm>
+      </p:grpSpPr>
+      <p:sp>
+        <p:nvSpPr>
+          <p:cNvPr id="2" name="Title 1">
+            <a:extLst>
+              <a:ext uri="{FF2B5EF4-FFF2-40B4-BE49-F238E27FC236}">
+                <a16:creationId xmlns:a16="http://schemas.microsoft.com/office/drawing/2014/main" id="{B4078902-93B5-5AFD-2DBF-BCB91EEF23CC}"/>
+              </a:ext>
+            </a:extLst>
+          </p:cNvPr>
+          <p:cNvSpPr>
+            <a:spLocks noGrp="1"/>
+          </p:cNvSpPr>
+          <p:nvPr>
+            <p:ph type="title"/>
+          </p:nvPr>
+        </p:nvSpPr>
+        <p:spPr/>
+        <p:txBody>
+          <a:bodyPr>
+            <a:normAutofit/>
+          </a:bodyPr>
+          <a:lstStyle/>
+          <a:p>
+            <a:pPr algn="ctr"/>
+            <a:r>
+              <a:rPr lang="en-US" sz="4400" dirty="0"/>
+              <a:t>Buzzer Output</a:t>
+            </a:r>
+          </a:p>
+        </p:txBody>
+      </p:sp>
+      <p:sp>
+        <p:nvSpPr>
+          <p:cNvPr id="3" name="Table Placeholder 2">
+            <a:extLst>
+              <a:ext uri="{FF2B5EF4-FFF2-40B4-BE49-F238E27FC236}">
+                <a16:creationId xmlns:a16="http://schemas.microsoft.com/office/drawing/2014/main" id="{C0328EA5-75F2-1983-A1C8-7961D1498670}"/>
+              </a:ext>
+            </a:extLst>
+          </p:cNvPr>
+          <p:cNvSpPr>
+            <a:spLocks noGrp="1"/>
+          </p:cNvSpPr>
+          <p:nvPr>
+            <p:ph type="tbl" sz="quarter" idx="13"/>
+          </p:nvPr>
+        </p:nvSpPr>
+        <p:spPr/>
+        <p:txBody>
+          <a:bodyPr/>
+          <a:lstStyle/>
+          <a:p>
+            <a:r>
+              <a:rPr lang="en-US" dirty="0"/>
+              <a:t>This is the same setup as the LED, except the buzzer doesn’t need a resistor and is not polarized (doesn’t matter which leg connect to what)</a:t>
+            </a:r>
+          </a:p>
+          <a:p>
+            <a:r>
+              <a:rPr lang="en-US" dirty="0"/>
+              <a:t>This time we use the tone() function rather than the </a:t>
+            </a:r>
+            <a:r>
+              <a:rPr lang="en-US" dirty="0" err="1"/>
+              <a:t>digitalWrite</a:t>
+            </a:r>
+            <a:r>
+              <a:rPr lang="en-US" dirty="0"/>
+              <a:t>() function</a:t>
+            </a:r>
+          </a:p>
+          <a:p>
+            <a:pPr lvl="1"/>
+            <a:r>
+              <a:rPr lang="en-US" dirty="0"/>
+              <a:t>Tone also writes to a digital output but also takes a frequency argument</a:t>
+            </a:r>
+          </a:p>
+          <a:p>
+            <a:pPr lvl="1"/>
+            <a:r>
+              <a:rPr lang="en-US" dirty="0"/>
+              <a:t>tone(</a:t>
+            </a:r>
+            <a:r>
+              <a:rPr lang="en-US" dirty="0" err="1"/>
+              <a:t>pinNumber</a:t>
+            </a:r>
+            <a:r>
+              <a:rPr lang="en-US" dirty="0"/>
+              <a:t>, f); </a:t>
+            </a:r>
+            <a:r>
+              <a:rPr lang="en-US" dirty="0">
+                <a:sym typeface="Wingdings" panose="05000000000000000000" pitchFamily="2" charset="2"/>
+              </a:rPr>
+              <a:t> plays a tone of frequency f from the buzzer by generating a square wave of the specified frequency.</a:t>
+            </a:r>
+          </a:p>
+          <a:p>
+            <a:pPr lvl="1"/>
+            <a:r>
+              <a:rPr lang="en-US" dirty="0">
+                <a:sym typeface="Wingdings" panose="05000000000000000000" pitchFamily="2" charset="2"/>
+              </a:rPr>
+              <a:t>We will often write to and read from inputs and outputs using functions besides </a:t>
+            </a:r>
+            <a:r>
+              <a:rPr lang="en-US" dirty="0" err="1">
+                <a:sym typeface="Wingdings" panose="05000000000000000000" pitchFamily="2" charset="2"/>
+              </a:rPr>
+              <a:t>digitalRead</a:t>
+            </a:r>
+            <a:r>
+              <a:rPr lang="en-US" dirty="0">
+                <a:sym typeface="Wingdings" panose="05000000000000000000" pitchFamily="2" charset="2"/>
+              </a:rPr>
+              <a:t> and </a:t>
+            </a:r>
+            <a:r>
+              <a:rPr lang="en-US" dirty="0" err="1">
+                <a:sym typeface="Wingdings" panose="05000000000000000000" pitchFamily="2" charset="2"/>
+              </a:rPr>
+              <a:t>digitalWrite</a:t>
+            </a:r>
+            <a:r>
+              <a:rPr lang="en-US" dirty="0">
+                <a:sym typeface="Wingdings" panose="05000000000000000000" pitchFamily="2" charset="2"/>
+              </a:rPr>
+              <a:t>. Some are provided (like tone), usually for specific hardware. and others we will make ourselves.</a:t>
+            </a:r>
+          </a:p>
+          <a:p>
+            <a:endParaRPr lang="en-US" dirty="0"/>
+          </a:p>
+        </p:txBody>
+      </p:sp>
+      <p:sp>
+        <p:nvSpPr>
+          <p:cNvPr id="4" name="Slide Number Placeholder 3">
+            <a:extLst>
+              <a:ext uri="{FF2B5EF4-FFF2-40B4-BE49-F238E27FC236}">
+                <a16:creationId xmlns:a16="http://schemas.microsoft.com/office/drawing/2014/main" id="{A509AFFB-4EAD-E639-1997-1DD42452860C}"/>
+              </a:ext>
+            </a:extLst>
+          </p:cNvPr>
+          <p:cNvSpPr>
+            <a:spLocks noGrp="1"/>
+          </p:cNvSpPr>
+          <p:nvPr>
+            <p:ph type="sldNum" sz="quarter" idx="12"/>
+          </p:nvPr>
+        </p:nvSpPr>
+        <p:spPr/>
+        <p:txBody>
+          <a:bodyPr/>
+          <a:lstStyle/>
+          <a:p>
+            <a:fld id="{EB37DED6-D4C7-42EE-AB49-D2E39E64FDE4}" type="slidenum">
+              <a:rPr lang="en-US" smtClean="0"/>
+              <a:pPr/>
+              <a:t>32</a:t>
+            </a:fld>
+            <a:endParaRPr lang="en-US" dirty="0"/>
+          </a:p>
+        </p:txBody>
+      </p:sp>
+    </p:spTree>
+    <p:extLst>
+      <p:ext uri="{BB962C8B-B14F-4D97-AF65-F5344CB8AC3E}">
+        <p14:creationId xmlns:p14="http://schemas.microsoft.com/office/powerpoint/2010/main" val="1498066369"/>
+      </p:ext>
+    </p:extLst>
+  </p:cSld>
+  <p:clrMapOvr>
+    <a:masterClrMapping/>
+  </p:clrMapOvr>
+  <mc:AlternateContent xmlns:mc="http://schemas.openxmlformats.org/markup-compatibility/2006">
+    <mc:Choice xmlns:p14="http://schemas.microsoft.com/office/powerpoint/2010/main" Requires="p14">
+      <p:transition spd="med" p14:dur="700">
+        <p:fade/>
+      </p:transition>
+    </mc:Choice>
+    <mc:Fallback>
+      <p:transition spd="med">
+        <p:fade/>
+      </p:transition>
+    </mc:Fallback>
+  </mc:AlternateContent>
+</p:sld>
+</file>
+
+<file path=ppt/slides/slide33.xml><?xml version="1.0" encoding="utf-8"?>
+<p:sld xmlns:a="http://schemas.openxmlformats.org/drawingml/2006/main" xmlns:r="http://schemas.openxmlformats.org/officeDocument/2006/relationships" xmlns:p="http://schemas.openxmlformats.org/presentationml/2006/main">
+  <p:cSld>
+    <p:spTree>
+      <p:nvGrpSpPr>
+        <p:cNvPr id="1" name="">
+          <a:extLst>
+            <a:ext uri="{FF2B5EF4-FFF2-40B4-BE49-F238E27FC236}">
+              <a16:creationId xmlns:a16="http://schemas.microsoft.com/office/drawing/2014/main" id="{F4D1009B-809A-5A8A-4338-587755691175}"/>
+            </a:ext>
+          </a:extLst>
+        </p:cNvPr>
+        <p:cNvGrpSpPr/>
+        <p:nvPr/>
+      </p:nvGrpSpPr>
+      <p:grpSpPr>
+        <a:xfrm>
+          <a:off x="0" y="0"/>
+          <a:ext cx="0" cy="0"/>
+          <a:chOff x="0" y="0"/>
+          <a:chExt cx="0" cy="0"/>
+        </a:xfrm>
+      </p:grpSpPr>
+      <p:sp>
+        <p:nvSpPr>
+          <p:cNvPr id="2" name="Title 1">
+            <a:extLst>
+              <a:ext uri="{FF2B5EF4-FFF2-40B4-BE49-F238E27FC236}">
+                <a16:creationId xmlns:a16="http://schemas.microsoft.com/office/drawing/2014/main" id="{5061899E-C9F9-5F11-2959-F2509DA52A4E}"/>
+              </a:ext>
+            </a:extLst>
+          </p:cNvPr>
+          <p:cNvSpPr>
+            <a:spLocks noGrp="1"/>
+          </p:cNvSpPr>
+          <p:nvPr>
+            <p:ph type="title"/>
+          </p:nvPr>
+        </p:nvSpPr>
+        <p:spPr/>
+        <p:txBody>
+          <a:bodyPr>
+            <a:normAutofit/>
+          </a:bodyPr>
+          <a:lstStyle/>
+          <a:p>
+            <a:pPr algn="ctr"/>
+            <a:r>
+              <a:rPr lang="en-US" sz="4400" dirty="0"/>
+              <a:t>Buzzer Output</a:t>
+            </a:r>
+          </a:p>
+        </p:txBody>
+      </p:sp>
+      <p:sp>
+        <p:nvSpPr>
+          <p:cNvPr id="4" name="Slide Number Placeholder 3">
+            <a:extLst>
+              <a:ext uri="{FF2B5EF4-FFF2-40B4-BE49-F238E27FC236}">
+                <a16:creationId xmlns:a16="http://schemas.microsoft.com/office/drawing/2014/main" id="{E2250411-99E3-1829-FC0D-AD598B95B853}"/>
+              </a:ext>
+            </a:extLst>
+          </p:cNvPr>
+          <p:cNvSpPr>
+            <a:spLocks noGrp="1"/>
+          </p:cNvSpPr>
+          <p:nvPr>
+            <p:ph type="sldNum" sz="quarter" idx="12"/>
+          </p:nvPr>
+        </p:nvSpPr>
+        <p:spPr/>
+        <p:txBody>
+          <a:bodyPr/>
+          <a:lstStyle/>
+          <a:p>
+            <a:fld id="{EB37DED6-D4C7-42EE-AB49-D2E39E64FDE4}" type="slidenum">
+              <a:rPr lang="en-US" smtClean="0"/>
+              <a:pPr/>
+              <a:t>33</a:t>
+            </a:fld>
+            <a:endParaRPr lang="en-US" dirty="0"/>
+          </a:p>
+        </p:txBody>
+      </p:sp>
+      <p:pic>
+        <p:nvPicPr>
+          <p:cNvPr id="8" name="Picture 7">
+            <a:extLst>
+              <a:ext uri="{FF2B5EF4-FFF2-40B4-BE49-F238E27FC236}">
+                <a16:creationId xmlns:a16="http://schemas.microsoft.com/office/drawing/2014/main" id="{E1B5373B-BC9F-6DF7-4B21-8F9A9C57A529}"/>
+              </a:ext>
+            </a:extLst>
+          </p:cNvPr>
+          <p:cNvPicPr>
+            <a:picLocks noChangeAspect="1"/>
+          </p:cNvPicPr>
+          <p:nvPr/>
+        </p:nvPicPr>
+        <p:blipFill>
+          <a:blip r:embed="rId2"/>
+          <a:stretch>
+            <a:fillRect/>
+          </a:stretch>
+        </p:blipFill>
+        <p:spPr>
+          <a:xfrm>
+            <a:off x="2332128" y="1767650"/>
+            <a:ext cx="7524568" cy="4422838"/>
+          </a:xfrm>
+          <a:prstGeom prst="rect">
+            <a:avLst/>
+          </a:prstGeom>
+        </p:spPr>
+      </p:pic>
+    </p:spTree>
+    <p:extLst>
+      <p:ext uri="{BB962C8B-B14F-4D97-AF65-F5344CB8AC3E}">
+        <p14:creationId xmlns:p14="http://schemas.microsoft.com/office/powerpoint/2010/main" val="1684696493"/>
+      </p:ext>
+    </p:extLst>
+  </p:cSld>
+  <p:clrMapOvr>
+    <a:masterClrMapping/>
+  </p:clrMapOvr>
+  <mc:AlternateContent xmlns:mc="http://schemas.openxmlformats.org/markup-compatibility/2006">
+    <mc:Choice xmlns:p14="http://schemas.microsoft.com/office/powerpoint/2010/main" Requires="p14">
+      <p:transition spd="med" p14:dur="700">
+        <p:fade/>
+      </p:transition>
+    </mc:Choice>
+    <mc:Fallback>
       <p:transition spd="med">
         <p:fade/>
       </p:transition>
@@ -14094,26 +15938,6 @@
 </file>
 
 <file path=customXml/item1.xml><?xml version="1.0" encoding="utf-8"?>
-<p:properties xmlns:p="http://schemas.microsoft.com/office/2006/metadata/properties" xmlns:xsi="http://www.w3.org/2001/XMLSchema-instance" xmlns:pc="http://schemas.microsoft.com/office/infopath/2007/PartnerControls">
-  <documentManagement>
-    <_ip_UnifiedCompliancePolicyUIAction xmlns="http://schemas.microsoft.com/sharepoint/v3" xsi:nil="true"/>
-    <Image xmlns="71af3243-3dd4-4a8d-8c0d-dd76da1f02a5">
-      <Url xsi:nil="true"/>
-      <Description xsi:nil="true"/>
-    </Image>
-    <Status xmlns="71af3243-3dd4-4a8d-8c0d-dd76da1f02a5">Not started</Status>
-    <Background xmlns="71af3243-3dd4-4a8d-8c0d-dd76da1f02a5">false</Background>
-    <_ip_UnifiedCompliancePolicyProperties xmlns="http://schemas.microsoft.com/sharepoint/v3" xsi:nil="true"/>
-    <ImageTagsTaxHTField xmlns="71af3243-3dd4-4a8d-8c0d-dd76da1f02a5">
-      <Terms xmlns="http://schemas.microsoft.com/office/infopath/2007/PartnerControls"/>
-    </ImageTagsTaxHTField>
-    <TaxCatchAll xmlns="230e9df3-be65-4c73-a93b-d1236ebd677e" xsi:nil="true"/>
-    <MediaServiceKeyPoints xmlns="71af3243-3dd4-4a8d-8c0d-dd76da1f02a5" xsi:nil="true"/>
-  </documentManagement>
-</p:properties>
-</file>
-
-<file path=customXml/item2.xml><?xml version="1.0" encoding="utf-8"?>
 <ct:contentTypeSchema xmlns:ct="http://schemas.microsoft.com/office/2006/metadata/contentType" xmlns:ma="http://schemas.microsoft.com/office/2006/metadata/properties/metaAttributes" ct:_="" ma:_="" ma:contentTypeName="Document" ma:contentTypeID="0x01010079F111ED35F8CC479449609E8A0923A6" ma:contentTypeVersion="28" ma:contentTypeDescription="Create a new document." ma:contentTypeScope="" ma:versionID="60f5a4f2d2b0abadcf532d48ebf9cb71">
   <xsd:schema xmlns:xsd="http://www.w3.org/2001/XMLSchema" xmlns:xs="http://www.w3.org/2001/XMLSchema" xmlns:p="http://schemas.microsoft.com/office/2006/metadata/properties" xmlns:ns1="http://schemas.microsoft.com/sharepoint/v3" xmlns:ns2="71af3243-3dd4-4a8d-8c0d-dd76da1f02a5" xmlns:ns3="16c05727-aa75-4e4a-9b5f-8a80a1165891" xmlns:ns4="230e9df3-be65-4c73-a93b-d1236ebd677e" targetNamespace="http://schemas.microsoft.com/office/2006/metadata/properties" ma:root="true" ma:fieldsID="7dd78129e6a1811f84807ad11c651531" ns1:_="" ns2:_="" ns3:_="" ns4:_="">
     <xsd:import namespace="http://schemas.microsoft.com/sharepoint/v3"/>
@@ -14425,6 +16249,26 @@
 </ct:contentTypeSchema>
 </file>
 
+<file path=customXml/item2.xml><?xml version="1.0" encoding="utf-8"?>
+<p:properties xmlns:p="http://schemas.microsoft.com/office/2006/metadata/properties" xmlns:xsi="http://www.w3.org/2001/XMLSchema-instance" xmlns:pc="http://schemas.microsoft.com/office/infopath/2007/PartnerControls">
+  <documentManagement>
+    <_ip_UnifiedCompliancePolicyUIAction xmlns="http://schemas.microsoft.com/sharepoint/v3" xsi:nil="true"/>
+    <Image xmlns="71af3243-3dd4-4a8d-8c0d-dd76da1f02a5">
+      <Url xsi:nil="true"/>
+      <Description xsi:nil="true"/>
+    </Image>
+    <Status xmlns="71af3243-3dd4-4a8d-8c0d-dd76da1f02a5">Not started</Status>
+    <Background xmlns="71af3243-3dd4-4a8d-8c0d-dd76da1f02a5">false</Background>
+    <_ip_UnifiedCompliancePolicyProperties xmlns="http://schemas.microsoft.com/sharepoint/v3" xsi:nil="true"/>
+    <ImageTagsTaxHTField xmlns="71af3243-3dd4-4a8d-8c0d-dd76da1f02a5">
+      <Terms xmlns="http://schemas.microsoft.com/office/infopath/2007/PartnerControls"/>
+    </ImageTagsTaxHTField>
+    <TaxCatchAll xmlns="230e9df3-be65-4c73-a93b-d1236ebd677e" xsi:nil="true"/>
+    <MediaServiceKeyPoints xmlns="71af3243-3dd4-4a8d-8c0d-dd76da1f02a5" xsi:nil="true"/>
+  </documentManagement>
+</p:properties>
+</file>
+
 <file path=customXml/item3.xml><?xml version="1.0" encoding="utf-8"?>
 <?mso-contentType ?>
 <FormTemplates xmlns="http://schemas.microsoft.com/sharepoint/v3/contenttype/forms">
@@ -14435,18 +16279,6 @@
 </file>
 
 <file path=customXml/itemProps1.xml><?xml version="1.0" encoding="utf-8"?>
-<ds:datastoreItem xmlns:ds="http://schemas.openxmlformats.org/officeDocument/2006/customXml" ds:itemID="{4DCB68CE-DF93-40D4-8A63-5E263F943342}">
-  <ds:schemaRefs>
-    <ds:schemaRef ds:uri="http://schemas.microsoft.com/office/2006/metadata/properties"/>
-    <ds:schemaRef ds:uri="http://schemas.microsoft.com/office/infopath/2007/PartnerControls"/>
-    <ds:schemaRef ds:uri="http://schemas.microsoft.com/sharepoint/v3"/>
-    <ds:schemaRef ds:uri="71af3243-3dd4-4a8d-8c0d-dd76da1f02a5"/>
-    <ds:schemaRef ds:uri="230e9df3-be65-4c73-a93b-d1236ebd677e"/>
-  </ds:schemaRefs>
-</ds:datastoreItem>
-</file>
-
-<file path=customXml/itemProps2.xml><?xml version="1.0" encoding="utf-8"?>
 <ds:datastoreItem xmlns:ds="http://schemas.openxmlformats.org/officeDocument/2006/customXml" ds:itemID="{8F09779A-09CC-406F-88A8-8C570F23E8A6}">
   <ds:schemaRefs>
     <ds:schemaRef ds:uri="http://schemas.microsoft.com/office/2006/metadata/contentType"/>
@@ -14467,6 +16299,18 @@
 </ds:datastoreItem>
 </file>
 
+<file path=customXml/itemProps2.xml><?xml version="1.0" encoding="utf-8"?>
+<ds:datastoreItem xmlns:ds="http://schemas.openxmlformats.org/officeDocument/2006/customXml" ds:itemID="{4DCB68CE-DF93-40D4-8A63-5E263F943342}">
+  <ds:schemaRefs>
+    <ds:schemaRef ds:uri="http://schemas.microsoft.com/office/2006/metadata/properties"/>
+    <ds:schemaRef ds:uri="http://schemas.microsoft.com/office/infopath/2007/PartnerControls"/>
+    <ds:schemaRef ds:uri="http://schemas.microsoft.com/sharepoint/v3"/>
+    <ds:schemaRef ds:uri="71af3243-3dd4-4a8d-8c0d-dd76da1f02a5"/>
+    <ds:schemaRef ds:uri="230e9df3-be65-4c73-a93b-d1236ebd677e"/>
+  </ds:schemaRefs>
+</ds:datastoreItem>
+</file>
+
 <file path=customXml/itemProps3.xml><?xml version="1.0" encoding="utf-8"?>
 <ds:datastoreItem xmlns:ds="http://schemas.openxmlformats.org/officeDocument/2006/customXml" ds:itemID="{16533545-1DB7-477E-8A8F-96BCFAC4DF02}">
   <ds:schemaRefs>
